--- a/ppt_review3.pptx
+++ b/ppt_review3.pptx
@@ -13,6 +13,12 @@
     <p:sldId id="261" r:id="rId12"/>
     <p:sldId id="262" r:id="rId13"/>
     <p:sldId id="263" r:id="rId14"/>
+    <p:sldId id="264" r:id="rId15"/>
+    <p:sldId id="265" r:id="rId16"/>
+    <p:sldId id="266" r:id="rId17"/>
+    <p:sldId id="267" r:id="rId18"/>
+    <p:sldId id="268" r:id="rId19"/>
+    <p:sldId id="269" r:id="rId20"/>
   </p:sldIdLst>
   <p:sldSz cx="12191695" cy="6858000" type="screen4x3"/>
   <p:notesSz cx="6858000" cy="9144000"/>
@@ -3333,6 +3339,2514 @@
 </p:sld>
 </file>
 
+<file path=ppt/slides/slide10.xml><?xml version="1.0" encoding="utf-8"?>
+<p:sld xmlns:a="http://schemas.openxmlformats.org/drawingml/2006/main" xmlns:p="http://schemas.openxmlformats.org/presentationml/2006/main" xmlns:r="http://schemas.openxmlformats.org/officeDocument/2006/relationships">
+  <p:cSld>
+    <p:spTree>
+      <p:nvGrpSpPr>
+        <p:cNvPr id="1" name=""/>
+        <p:cNvGrpSpPr/>
+        <p:nvPr/>
+      </p:nvGrpSpPr>
+      <p:grpSpPr/>
+      <p:sp>
+        <p:nvSpPr>
+          <p:cNvPr id="2" name="Rectangle 1"/>
+          <p:cNvSpPr/>
+          <p:nvPr/>
+        </p:nvSpPr>
+        <p:spPr>
+          <a:xfrm>
+            <a:off x="0" y="0"/>
+            <a:ext cx="12191695" cy="6858000"/>
+          </a:xfrm>
+          <a:prstGeom prst="rect">
+            <a:avLst/>
+          </a:prstGeom>
+          <a:solidFill>
+            <a:srgbClr val="F2F5FA"/>
+          </a:solidFill>
+          <a:ln>
+            <a:noFill/>
+          </a:ln>
+          <a:effectLst/>
+        </p:spPr>
+        <p:style>
+          <a:lnRef idx="1">
+            <a:schemeClr val="accent1"/>
+          </a:lnRef>
+          <a:fillRef idx="3">
+            <a:schemeClr val="accent1"/>
+          </a:fillRef>
+          <a:effectRef idx="2">
+            <a:schemeClr val="accent1"/>
+          </a:effectRef>
+          <a:fontRef idx="minor">
+            <a:schemeClr val="lt1"/>
+          </a:fontRef>
+        </p:style>
+        <p:txBody>
+          <a:bodyPr rtlCol="0" anchor="ctr"/>
+          <a:lstStyle/>
+          <a:p>
+            <a:pPr algn="ctr"/>
+          </a:p>
+        </p:txBody>
+      </p:sp>
+      <p:sp>
+        <p:nvSpPr>
+          <p:cNvPr id="3" name="Rectangle 2"/>
+          <p:cNvSpPr/>
+          <p:nvPr/>
+        </p:nvSpPr>
+        <p:spPr>
+          <a:xfrm>
+            <a:off x="0" y="0"/>
+            <a:ext cx="12191695" cy="1051560"/>
+          </a:xfrm>
+          <a:prstGeom prst="rect">
+            <a:avLst/>
+          </a:prstGeom>
+          <a:solidFill>
+            <a:srgbClr val="0E1A2B"/>
+          </a:solidFill>
+          <a:ln>
+            <a:noFill/>
+          </a:ln>
+          <a:effectLst/>
+        </p:spPr>
+        <p:style>
+          <a:lnRef idx="1">
+            <a:schemeClr val="accent1"/>
+          </a:lnRef>
+          <a:fillRef idx="3">
+            <a:schemeClr val="accent1"/>
+          </a:fillRef>
+          <a:effectRef idx="2">
+            <a:schemeClr val="accent1"/>
+          </a:effectRef>
+          <a:fontRef idx="minor">
+            <a:schemeClr val="lt1"/>
+          </a:fontRef>
+        </p:style>
+        <p:txBody>
+          <a:bodyPr rtlCol="0" anchor="ctr" wrap="square" lIns="502920" tIns="109728"/>
+          <a:lstStyle/>
+          <a:p>
+            <a:pPr algn="ctr"/>
+            <a:r>
+              <a:rPr sz="1200" b="1">
+                <a:solidFill>
+                  <a:srgbClr val="35C4D5"/>
+                </a:solidFill>
+              </a:rPr>
+              <a:t>APPLICATION FEATURES</a:t>
+            </a:r>
+          </a:p>
+          <a:p>
+            <a:r>
+              <a:rPr sz="2600" b="1">
+                <a:solidFill>
+                  <a:srgbClr val="FFFFFF"/>
+                </a:solidFill>
+              </a:rPr>
+              <a:t>Application Screenshots</a:t>
+            </a:r>
+          </a:p>
+        </p:txBody>
+      </p:sp>
+      <p:sp>
+        <p:nvSpPr>
+          <p:cNvPr id="4" name="Rectangle 3"/>
+          <p:cNvSpPr/>
+          <p:nvPr/>
+        </p:nvSpPr>
+        <p:spPr>
+          <a:xfrm>
+            <a:off x="0" y="1051560"/>
+            <a:ext cx="12191695" cy="50800"/>
+          </a:xfrm>
+          <a:prstGeom prst="rect">
+            <a:avLst/>
+          </a:prstGeom>
+          <a:solidFill>
+            <a:srgbClr val="35C4D5"/>
+          </a:solidFill>
+          <a:ln>
+            <a:noFill/>
+          </a:ln>
+          <a:effectLst/>
+        </p:spPr>
+        <p:style>
+          <a:lnRef idx="1">
+            <a:schemeClr val="accent1"/>
+          </a:lnRef>
+          <a:fillRef idx="3">
+            <a:schemeClr val="accent1"/>
+          </a:fillRef>
+          <a:effectRef idx="2">
+            <a:schemeClr val="accent1"/>
+          </a:effectRef>
+          <a:fontRef idx="minor">
+            <a:schemeClr val="lt1"/>
+          </a:fontRef>
+        </p:style>
+        <p:txBody>
+          <a:bodyPr rtlCol="0" anchor="ctr"/>
+          <a:lstStyle/>
+          <a:p>
+            <a:pPr algn="ctr"/>
+          </a:p>
+        </p:txBody>
+      </p:sp>
+      <p:pic>
+        <p:nvPicPr>
+          <p:cNvPr id="5" name="Picture 4" descr="procurement.png"/>
+          <p:cNvPicPr>
+            <a:picLocks noChangeAspect="1"/>
+          </p:cNvPicPr>
+          <p:nvPr/>
+        </p:nvPicPr>
+        <p:blipFill>
+          <a:blip r:embed="rId2"/>
+          <a:stretch>
+            <a:fillRect/>
+          </a:stretch>
+        </p:blipFill>
+        <p:spPr>
+          <a:xfrm>
+            <a:off x="548640" y="1737360"/>
+            <a:ext cx="5303520" cy="3314700"/>
+          </a:xfrm>
+          <a:prstGeom prst="rect">
+            <a:avLst/>
+          </a:prstGeom>
+        </p:spPr>
+      </p:pic>
+      <p:sp>
+        <p:nvSpPr>
+          <p:cNvPr id="6" name="TextBox 5"/>
+          <p:cNvSpPr txBox="1"/>
+          <p:nvPr/>
+        </p:nvSpPr>
+        <p:spPr>
+          <a:xfrm>
+            <a:off x="548640" y="5070348"/>
+            <a:ext cx="5303520" cy="274320"/>
+          </a:xfrm>
+          <a:prstGeom prst="rect">
+            <a:avLst/>
+          </a:prstGeom>
+          <a:noFill/>
+        </p:spPr>
+        <p:txBody>
+          <a:bodyPr wrap="none">
+            <a:spAutoFit/>
+          </a:bodyPr>
+          <a:lstStyle/>
+          <a:p>
+            <a:r>
+              <a:rPr sz="1100" b="1">
+                <a:solidFill>
+                  <a:srgbClr val="0E1A2B"/>
+                </a:solidFill>
+              </a:rPr>
+              <a:t>Purchases &amp; Renewals — procurement forms</a:t>
+            </a:r>
+          </a:p>
+        </p:txBody>
+      </p:sp>
+      <p:pic>
+        <p:nvPicPr>
+          <p:cNvPr id="7" name="Picture 6" descr="manage_add.png"/>
+          <p:cNvPicPr>
+            <a:picLocks noChangeAspect="1"/>
+          </p:cNvPicPr>
+          <p:nvPr/>
+        </p:nvPicPr>
+        <p:blipFill>
+          <a:blip r:embed="rId3"/>
+          <a:stretch>
+            <a:fillRect/>
+          </a:stretch>
+        </p:blipFill>
+        <p:spPr>
+          <a:xfrm>
+            <a:off x="6080759" y="1737360"/>
+            <a:ext cx="5303520" cy="3314700"/>
+          </a:xfrm>
+          <a:prstGeom prst="rect">
+            <a:avLst/>
+          </a:prstGeom>
+        </p:spPr>
+      </p:pic>
+      <p:sp>
+        <p:nvSpPr>
+          <p:cNvPr id="8" name="TextBox 7"/>
+          <p:cNvSpPr txBox="1"/>
+          <p:nvPr/>
+        </p:nvSpPr>
+        <p:spPr>
+          <a:xfrm>
+            <a:off x="6080759" y="5070348"/>
+            <a:ext cx="5303520" cy="274320"/>
+          </a:xfrm>
+          <a:prstGeom prst="rect">
+            <a:avLst/>
+          </a:prstGeom>
+          <a:noFill/>
+        </p:spPr>
+        <p:txBody>
+          <a:bodyPr wrap="none">
+            <a:spAutoFit/>
+          </a:bodyPr>
+          <a:lstStyle/>
+          <a:p>
+            <a:r>
+              <a:rPr sz="1100" b="1">
+                <a:solidFill>
+                  <a:srgbClr val="0E1A2B"/>
+                </a:solidFill>
+              </a:rPr>
+              <a:t>Manage Data — add-row form with FK dropdowns</a:t>
+            </a:r>
+          </a:p>
+        </p:txBody>
+      </p:sp>
+      <p:sp>
+        <p:nvSpPr>
+          <p:cNvPr id="9" name="TextBox 8"/>
+          <p:cNvSpPr txBox="1"/>
+          <p:nvPr/>
+        </p:nvSpPr>
+        <p:spPr>
+          <a:xfrm>
+            <a:off x="548640" y="6355080"/>
+            <a:ext cx="11064240" cy="365760"/>
+          </a:xfrm>
+          <a:prstGeom prst="rect">
+            <a:avLst/>
+          </a:prstGeom>
+          <a:noFill/>
+        </p:spPr>
+        <p:txBody>
+          <a:bodyPr wrap="none">
+            <a:spAutoFit/>
+          </a:bodyPr>
+          <a:lstStyle/>
+          <a:p>
+            <a:r>
+              <a:rPr sz="1000">
+                <a:solidFill>
+                  <a:srgbClr val="5A6473"/>
+                </a:solidFill>
+              </a:rPr>
+              <a:t>Live capture from the running prototype — streamlit run app.py</a:t>
+            </a:r>
+          </a:p>
+        </p:txBody>
+      </p:sp>
+    </p:spTree>
+  </p:cSld>
+  <p:clrMapOvr>
+    <a:masterClrMapping/>
+  </p:clrMapOvr>
+</p:sld>
+</file>
+
+<file path=ppt/slides/slide11.xml><?xml version="1.0" encoding="utf-8"?>
+<p:sld xmlns:a="http://schemas.openxmlformats.org/drawingml/2006/main" xmlns:p="http://schemas.openxmlformats.org/presentationml/2006/main" xmlns:r="http://schemas.openxmlformats.org/officeDocument/2006/relationships">
+  <p:cSld>
+    <p:spTree>
+      <p:nvGrpSpPr>
+        <p:cNvPr id="1" name=""/>
+        <p:cNvGrpSpPr/>
+        <p:nvPr/>
+      </p:nvGrpSpPr>
+      <p:grpSpPr/>
+      <p:sp>
+        <p:nvSpPr>
+          <p:cNvPr id="2" name="Rectangle 1"/>
+          <p:cNvSpPr/>
+          <p:nvPr/>
+        </p:nvSpPr>
+        <p:spPr>
+          <a:xfrm>
+            <a:off x="0" y="0"/>
+            <a:ext cx="12191695" cy="6858000"/>
+          </a:xfrm>
+          <a:prstGeom prst="rect">
+            <a:avLst/>
+          </a:prstGeom>
+          <a:solidFill>
+            <a:srgbClr val="F2F5FA"/>
+          </a:solidFill>
+          <a:ln>
+            <a:noFill/>
+          </a:ln>
+          <a:effectLst/>
+        </p:spPr>
+        <p:style>
+          <a:lnRef idx="1">
+            <a:schemeClr val="accent1"/>
+          </a:lnRef>
+          <a:fillRef idx="3">
+            <a:schemeClr val="accent1"/>
+          </a:fillRef>
+          <a:effectRef idx="2">
+            <a:schemeClr val="accent1"/>
+          </a:effectRef>
+          <a:fontRef idx="minor">
+            <a:schemeClr val="lt1"/>
+          </a:fontRef>
+        </p:style>
+        <p:txBody>
+          <a:bodyPr rtlCol="0" anchor="ctr"/>
+          <a:lstStyle/>
+          <a:p>
+            <a:pPr algn="ctr"/>
+          </a:p>
+        </p:txBody>
+      </p:sp>
+      <p:sp>
+        <p:nvSpPr>
+          <p:cNvPr id="3" name="Rectangle 2"/>
+          <p:cNvSpPr/>
+          <p:nvPr/>
+        </p:nvSpPr>
+        <p:spPr>
+          <a:xfrm>
+            <a:off x="0" y="0"/>
+            <a:ext cx="12191695" cy="1051560"/>
+          </a:xfrm>
+          <a:prstGeom prst="rect">
+            <a:avLst/>
+          </a:prstGeom>
+          <a:solidFill>
+            <a:srgbClr val="0E1A2B"/>
+          </a:solidFill>
+          <a:ln>
+            <a:noFill/>
+          </a:ln>
+          <a:effectLst/>
+        </p:spPr>
+        <p:style>
+          <a:lnRef idx="1">
+            <a:schemeClr val="accent1"/>
+          </a:lnRef>
+          <a:fillRef idx="3">
+            <a:schemeClr val="accent1"/>
+          </a:fillRef>
+          <a:effectRef idx="2">
+            <a:schemeClr val="accent1"/>
+          </a:effectRef>
+          <a:fontRef idx="minor">
+            <a:schemeClr val="lt1"/>
+          </a:fontRef>
+        </p:style>
+        <p:txBody>
+          <a:bodyPr rtlCol="0" anchor="ctr" wrap="square" lIns="502920" tIns="109728"/>
+          <a:lstStyle/>
+          <a:p>
+            <a:pPr algn="ctr"/>
+            <a:r>
+              <a:rPr sz="1200" b="1">
+                <a:solidFill>
+                  <a:srgbClr val="35C4D5"/>
+                </a:solidFill>
+              </a:rPr>
+              <a:t>FINAL DEMONSTRATION</a:t>
+            </a:r>
+          </a:p>
+          <a:p>
+            <a:r>
+              <a:rPr sz="2600" b="1">
+                <a:solidFill>
+                  <a:srgbClr val="FFFFFF"/>
+                </a:solidFill>
+              </a:rPr>
+              <a:t>Business Rule Validation — Negative Test Evidence</a:t>
+            </a:r>
+          </a:p>
+        </p:txBody>
+      </p:sp>
+      <p:sp>
+        <p:nvSpPr>
+          <p:cNvPr id="4" name="Rectangle 3"/>
+          <p:cNvSpPr/>
+          <p:nvPr/>
+        </p:nvSpPr>
+        <p:spPr>
+          <a:xfrm>
+            <a:off x="0" y="1051560"/>
+            <a:ext cx="12191695" cy="50800"/>
+          </a:xfrm>
+          <a:prstGeom prst="rect">
+            <a:avLst/>
+          </a:prstGeom>
+          <a:solidFill>
+            <a:srgbClr val="35C4D5"/>
+          </a:solidFill>
+          <a:ln>
+            <a:noFill/>
+          </a:ln>
+          <a:effectLst/>
+        </p:spPr>
+        <p:style>
+          <a:lnRef idx="1">
+            <a:schemeClr val="accent1"/>
+          </a:lnRef>
+          <a:fillRef idx="3">
+            <a:schemeClr val="accent1"/>
+          </a:fillRef>
+          <a:effectRef idx="2">
+            <a:schemeClr val="accent1"/>
+          </a:effectRef>
+          <a:fontRef idx="minor">
+            <a:schemeClr val="lt1"/>
+          </a:fontRef>
+        </p:style>
+        <p:txBody>
+          <a:bodyPr rtlCol="0" anchor="ctr"/>
+          <a:lstStyle/>
+          <a:p>
+            <a:pPr algn="ctr"/>
+          </a:p>
+        </p:txBody>
+      </p:sp>
+      <p:graphicFrame>
+        <p:nvGraphicFramePr>
+          <p:cNvPr id="5" name="Table 4"/>
+          <p:cNvGraphicFramePr>
+            <a:graphicFrameLocks noGrp="1"/>
+          </p:cNvGraphicFramePr>
+          <p:nvPr/>
+        </p:nvGraphicFramePr>
+        <p:xfrm>
+          <a:off x="548640" y="1554480"/>
+          <a:ext cx="11064239" cy="2194560"/>
+        </p:xfrm>
+        <a:graphic>
+          <a:graphicData uri="http://schemas.openxmlformats.org/drawingml/2006/table">
+            <a:tbl>
+              <a:tblPr firstRow="1" bandRow="1">
+                <a:tableStyleId>{5C22544A-7EE6-4342-B048-85BDC9FD1C3A}</a:tableStyleId>
+              </a:tblPr>
+              <a:tblGrid>
+                <a:gridCol w="2799386"/>
+                <a:gridCol w="3065994"/>
+                <a:gridCol w="4399035"/>
+                <a:gridCol w="799824"/>
+              </a:tblGrid>
+              <a:tr h="365760">
+                <a:tc>
+                  <a:txBody>
+                    <a:bodyPr/>
+                    <a:lstStyle/>
+                    <a:p>
+                      <a:r>
+                        <a:rPr sz="1150" b="1">
+                          <a:solidFill>
+                            <a:srgbClr val="FFFFFF"/>
+                          </a:solidFill>
+                        </a:rPr>
+                        <a:t>Scenario</a:t>
+                      </a:r>
+                    </a:p>
+                  </a:txBody>
+                  <a:tcPr>
+                    <a:solidFill>
+                      <a:srgbClr val="0E1A2B"/>
+                    </a:solidFill>
+                  </a:tcPr>
+                </a:tc>
+                <a:tc>
+                  <a:txBody>
+                    <a:bodyPr/>
+                    <a:lstStyle/>
+                    <a:p>
+                      <a:r>
+                        <a:rPr sz="1150" b="1">
+                          <a:solidFill>
+                            <a:srgbClr val="FFFFFF"/>
+                          </a:solidFill>
+                        </a:rPr>
+                        <a:t>Attempted Operation</a:t>
+                      </a:r>
+                    </a:p>
+                  </a:txBody>
+                  <a:tcPr>
+                    <a:solidFill>
+                      <a:srgbClr val="0E1A2B"/>
+                    </a:solidFill>
+                  </a:tcPr>
+                </a:tc>
+                <a:tc>
+                  <a:txBody>
+                    <a:bodyPr/>
+                    <a:lstStyle/>
+                    <a:p>
+                      <a:r>
+                        <a:rPr sz="1150" b="1">
+                          <a:solidFill>
+                            <a:srgbClr val="FFFFFF"/>
+                          </a:solidFill>
+                        </a:rPr>
+                        <a:t>Observed Behaviour</a:t>
+                      </a:r>
+                    </a:p>
+                  </a:txBody>
+                  <a:tcPr>
+                    <a:solidFill>
+                      <a:srgbClr val="0E1A2B"/>
+                    </a:solidFill>
+                  </a:tcPr>
+                </a:tc>
+                <a:tc>
+                  <a:txBody>
+                    <a:bodyPr/>
+                    <a:lstStyle/>
+                    <a:p>
+                      <a:r>
+                        <a:rPr sz="1150" b="1">
+                          <a:solidFill>
+                            <a:srgbClr val="FFFFFF"/>
+                          </a:solidFill>
+                        </a:rPr>
+                        <a:t>Result</a:t>
+                      </a:r>
+                    </a:p>
+                  </a:txBody>
+                  <a:tcPr>
+                    <a:solidFill>
+                      <a:srgbClr val="0E1A2B"/>
+                    </a:solidFill>
+                  </a:tcPr>
+                </a:tc>
+              </a:tr>
+              <a:tr h="365760">
+                <a:tc>
+                  <a:txBody>
+                    <a:bodyPr/>
+                    <a:lstStyle/>
+                    <a:p>
+                      <a:r>
+                        <a:rPr sz="1150">
+                          <a:solidFill>
+                            <a:srgbClr val="0E1A2B"/>
+                          </a:solidFill>
+                        </a:rPr>
+                        <a:t>Over-allocate beyond purchased seats</a:t>
+                      </a:r>
+                    </a:p>
+                  </a:txBody>
+                  <a:tcPr>
+                    <a:solidFill>
+                      <a:srgbClr val="FFFFFF"/>
+                    </a:solidFill>
+                  </a:tcPr>
+                </a:tc>
+                <a:tc>
+                  <a:txBody>
+                    <a:bodyPr/>
+                    <a:lstStyle/>
+                    <a:p>
+                      <a:r>
+                        <a:rPr sz="1150">
+                          <a:solidFill>
+                            <a:srgbClr val="0E1A2B"/>
+                          </a:solidFill>
+                        </a:rPr>
+                        <a:t>INSERT into ALLOCATION at seat limit</a:t>
+                      </a:r>
+                    </a:p>
+                  </a:txBody>
+                  <a:tcPr>
+                    <a:solidFill>
+                      <a:srgbClr val="FFFFFF"/>
+                    </a:solidFill>
+                  </a:tcPr>
+                </a:tc>
+                <a:tc>
+                  <a:txBody>
+                    <a:bodyPr/>
+                    <a:lstStyle/>
+                    <a:p>
+                      <a:r>
+                        <a:rPr sz="1150">
+                          <a:solidFill>
+                            <a:srgbClr val="0E1A2B"/>
+                          </a:solidFill>
+                        </a:rPr>
+                        <a:t>Aborted — 'BR-03 violated: all purchased seats allocated'</a:t>
+                      </a:r>
+                    </a:p>
+                  </a:txBody>
+                  <a:tcPr>
+                    <a:solidFill>
+                      <a:srgbClr val="FFFFFF"/>
+                    </a:solidFill>
+                  </a:tcPr>
+                </a:tc>
+                <a:tc>
+                  <a:txBody>
+                    <a:bodyPr/>
+                    <a:lstStyle/>
+                    <a:p>
+                      <a:r>
+                        <a:rPr sz="1150">
+                          <a:solidFill>
+                            <a:srgbClr val="0E1A2B"/>
+                          </a:solidFill>
+                        </a:rPr>
+                        <a:t>PASS</a:t>
+                      </a:r>
+                    </a:p>
+                  </a:txBody>
+                  <a:tcPr>
+                    <a:solidFill>
+                      <a:srgbClr val="FFFFFF"/>
+                    </a:solidFill>
+                  </a:tcPr>
+                </a:tc>
+              </a:tr>
+              <a:tr h="365760">
+                <a:tc>
+                  <a:txBody>
+                    <a:bodyPr/>
+                    <a:lstStyle/>
+                    <a:p>
+                      <a:r>
+                        <a:rPr sz="1150">
+                          <a:solidFill>
+                            <a:srgbClr val="0E1A2B"/>
+                          </a:solidFill>
+                        </a:rPr>
+                        <a:t>Allocate on non-ACTIVE license</a:t>
+                      </a:r>
+                    </a:p>
+                  </a:txBody>
+                  <a:tcPr>
+                    <a:solidFill>
+                      <a:srgbClr val="EAF0F9"/>
+                    </a:solidFill>
+                  </a:tcPr>
+                </a:tc>
+                <a:tc>
+                  <a:txBody>
+                    <a:bodyPr/>
+                    <a:lstStyle/>
+                    <a:p>
+                      <a:r>
+                        <a:rPr sz="1150">
+                          <a:solidFill>
+                            <a:srgbClr val="0E1A2B"/>
+                          </a:solidFill>
+                        </a:rPr>
+                        <a:t>INSERT against expired/revoked license</a:t>
+                      </a:r>
+                    </a:p>
+                  </a:txBody>
+                  <a:tcPr>
+                    <a:solidFill>
+                      <a:srgbClr val="EAF0F9"/>
+                    </a:solidFill>
+                  </a:tcPr>
+                </a:tc>
+                <a:tc>
+                  <a:txBody>
+                    <a:bodyPr/>
+                    <a:lstStyle/>
+                    <a:p>
+                      <a:r>
+                        <a:rPr sz="1150">
+                          <a:solidFill>
+                            <a:srgbClr val="0E1A2B"/>
+                          </a:solidFill>
+                        </a:rPr>
+                        <a:t>Aborted by trigger BR-01</a:t>
+                      </a:r>
+                    </a:p>
+                  </a:txBody>
+                  <a:tcPr>
+                    <a:solidFill>
+                      <a:srgbClr val="EAF0F9"/>
+                    </a:solidFill>
+                  </a:tcPr>
+                </a:tc>
+                <a:tc>
+                  <a:txBody>
+                    <a:bodyPr/>
+                    <a:lstStyle/>
+                    <a:p>
+                      <a:r>
+                        <a:rPr sz="1150">
+                          <a:solidFill>
+                            <a:srgbClr val="0E1A2B"/>
+                          </a:solidFill>
+                        </a:rPr>
+                        <a:t>PASS</a:t>
+                      </a:r>
+                    </a:p>
+                  </a:txBody>
+                  <a:tcPr>
+                    <a:solidFill>
+                      <a:srgbClr val="EAF0F9"/>
+                    </a:solidFill>
+                  </a:tcPr>
+                </a:tc>
+              </a:tr>
+              <a:tr h="365760">
+                <a:tc>
+                  <a:txBody>
+                    <a:bodyPr/>
+                    <a:lstStyle/>
+                    <a:p>
+                      <a:r>
+                        <a:rPr sz="1150">
+                          <a:solidFill>
+                            <a:srgbClr val="0E1A2B"/>
+                          </a:solidFill>
+                        </a:rPr>
+                        <a:t>Return date before allocation date</a:t>
+                      </a:r>
+                    </a:p>
+                  </a:txBody>
+                  <a:tcPr>
+                    <a:solidFill>
+                      <a:srgbClr val="FFFFFF"/>
+                    </a:solidFill>
+                  </a:tcPr>
+                </a:tc>
+                <a:tc>
+                  <a:txBody>
+                    <a:bodyPr/>
+                    <a:lstStyle/>
+                    <a:p>
+                      <a:r>
+                        <a:rPr sz="1150">
+                          <a:solidFill>
+                            <a:srgbClr val="0E1A2B"/>
+                          </a:solidFill>
+                        </a:rPr>
+                        <a:t>UPDATE ALLOCATION with earlier return</a:t>
+                      </a:r>
+                    </a:p>
+                  </a:txBody>
+                  <a:tcPr>
+                    <a:solidFill>
+                      <a:srgbClr val="FFFFFF"/>
+                    </a:solidFill>
+                  </a:tcPr>
+                </a:tc>
+                <a:tc>
+                  <a:txBody>
+                    <a:bodyPr/>
+                    <a:lstStyle/>
+                    <a:p>
+                      <a:r>
+                        <a:rPr sz="1150">
+                          <a:solidFill>
+                            <a:srgbClr val="0E1A2B"/>
+                          </a:solidFill>
+                        </a:rPr>
+                        <a:t>Aborted by BR-04 CHECK + trigger</a:t>
+                      </a:r>
+                    </a:p>
+                  </a:txBody>
+                  <a:tcPr>
+                    <a:solidFill>
+                      <a:srgbClr val="FFFFFF"/>
+                    </a:solidFill>
+                  </a:tcPr>
+                </a:tc>
+                <a:tc>
+                  <a:txBody>
+                    <a:bodyPr/>
+                    <a:lstStyle/>
+                    <a:p>
+                      <a:r>
+                        <a:rPr sz="1150">
+                          <a:solidFill>
+                            <a:srgbClr val="0E1A2B"/>
+                          </a:solidFill>
+                        </a:rPr>
+                        <a:t>PASS</a:t>
+                      </a:r>
+                    </a:p>
+                  </a:txBody>
+                  <a:tcPr>
+                    <a:solidFill>
+                      <a:srgbClr val="FFFFFF"/>
+                    </a:solidFill>
+                  </a:tcPr>
+                </a:tc>
+              </a:tr>
+              <a:tr h="365760">
+                <a:tc>
+                  <a:txBody>
+                    <a:bodyPr/>
+                    <a:lstStyle/>
+                    <a:p>
+                      <a:r>
+                        <a:rPr sz="1150">
+                          <a:solidFill>
+                            <a:srgbClr val="0E1A2B"/>
+                          </a:solidFill>
+                        </a:rPr>
+                        <a:t>Duplicate license key / invoice</a:t>
+                      </a:r>
+                    </a:p>
+                  </a:txBody>
+                  <a:tcPr>
+                    <a:solidFill>
+                      <a:srgbClr val="EAF0F9"/>
+                    </a:solidFill>
+                  </a:tcPr>
+                </a:tc>
+                <a:tc>
+                  <a:txBody>
+                    <a:bodyPr/>
+                    <a:lstStyle/>
+                    <a:p>
+                      <a:r>
+                        <a:rPr sz="1150">
+                          <a:solidFill>
+                            <a:srgbClr val="0E1A2B"/>
+                          </a:solidFill>
+                        </a:rPr>
+                        <a:t>INSERT duplicate key</a:t>
+                      </a:r>
+                    </a:p>
+                  </a:txBody>
+                  <a:tcPr>
+                    <a:solidFill>
+                      <a:srgbClr val="EAF0F9"/>
+                    </a:solidFill>
+                  </a:tcPr>
+                </a:tc>
+                <a:tc>
+                  <a:txBody>
+                    <a:bodyPr/>
+                    <a:lstStyle/>
+                    <a:p>
+                      <a:r>
+                        <a:rPr sz="1150">
+                          <a:solidFill>
+                            <a:srgbClr val="0E1A2B"/>
+                          </a:solidFill>
+                        </a:rPr>
+                        <a:t>Rejected by UNIQUE constraint</a:t>
+                      </a:r>
+                    </a:p>
+                  </a:txBody>
+                  <a:tcPr>
+                    <a:solidFill>
+                      <a:srgbClr val="EAF0F9"/>
+                    </a:solidFill>
+                  </a:tcPr>
+                </a:tc>
+                <a:tc>
+                  <a:txBody>
+                    <a:bodyPr/>
+                    <a:lstStyle/>
+                    <a:p>
+                      <a:r>
+                        <a:rPr sz="1150">
+                          <a:solidFill>
+                            <a:srgbClr val="0E1A2B"/>
+                          </a:solidFill>
+                        </a:rPr>
+                        <a:t>PASS</a:t>
+                      </a:r>
+                    </a:p>
+                  </a:txBody>
+                  <a:tcPr>
+                    <a:solidFill>
+                      <a:srgbClr val="EAF0F9"/>
+                    </a:solidFill>
+                  </a:tcPr>
+                </a:tc>
+              </a:tr>
+              <a:tr h="365760">
+                <a:tc>
+                  <a:txBody>
+                    <a:bodyPr/>
+                    <a:lstStyle/>
+                    <a:p>
+                      <a:r>
+                        <a:rPr sz="1150">
+                          <a:solidFill>
+                            <a:srgbClr val="0E1A2B"/>
+                          </a:solidFill>
+                        </a:rPr>
+                        <a:t>Reclaim non-active allocation</a:t>
+                      </a:r>
+                    </a:p>
+                  </a:txBody>
+                  <a:tcPr>
+                    <a:solidFill>
+                      <a:srgbClr val="FFFFFF"/>
+                    </a:solidFill>
+                  </a:tcPr>
+                </a:tc>
+                <a:tc>
+                  <a:txBody>
+                    <a:bodyPr/>
+                    <a:lstStyle/>
+                    <a:p>
+                      <a:r>
+                        <a:rPr sz="1150">
+                          <a:solidFill>
+                            <a:srgbClr val="0E1A2B"/>
+                          </a:solidFill>
+                        </a:rPr>
+                        <a:t>CALL sp_reclaim_license on RECLAIMED row</a:t>
+                      </a:r>
+                    </a:p>
+                  </a:txBody>
+                  <a:tcPr>
+                    <a:solidFill>
+                      <a:srgbClr val="FFFFFF"/>
+                    </a:solidFill>
+                  </a:tcPr>
+                </a:tc>
+                <a:tc>
+                  <a:txBody>
+                    <a:bodyPr/>
+                    <a:lstStyle/>
+                    <a:p>
+                      <a:r>
+                        <a:rPr sz="1150">
+                          <a:solidFill>
+                            <a:srgbClr val="0E1A2B"/>
+                          </a:solidFill>
+                        </a:rPr>
+                        <a:t>Aborted — 'Allocation not found or not ACTIVE'</a:t>
+                      </a:r>
+                    </a:p>
+                  </a:txBody>
+                  <a:tcPr>
+                    <a:solidFill>
+                      <a:srgbClr val="FFFFFF"/>
+                    </a:solidFill>
+                  </a:tcPr>
+                </a:tc>
+                <a:tc>
+                  <a:txBody>
+                    <a:bodyPr/>
+                    <a:lstStyle/>
+                    <a:p>
+                      <a:r>
+                        <a:rPr sz="1150">
+                          <a:solidFill>
+                            <a:srgbClr val="0E1A2B"/>
+                          </a:solidFill>
+                        </a:rPr>
+                        <a:t>PASS</a:t>
+                      </a:r>
+                    </a:p>
+                  </a:txBody>
+                  <a:tcPr>
+                    <a:solidFill>
+                      <a:srgbClr val="FFFFFF"/>
+                    </a:solidFill>
+                  </a:tcPr>
+                </a:tc>
+              </a:tr>
+            </a:tbl>
+          </a:graphicData>
+        </a:graphic>
+      </p:graphicFrame>
+      <p:sp>
+        <p:nvSpPr>
+          <p:cNvPr id="6" name="TextBox 5"/>
+          <p:cNvSpPr txBox="1"/>
+          <p:nvPr/>
+        </p:nvSpPr>
+        <p:spPr>
+          <a:xfrm>
+            <a:off x="548640" y="6355080"/>
+            <a:ext cx="11064240" cy="365760"/>
+          </a:xfrm>
+          <a:prstGeom prst="rect">
+            <a:avLst/>
+          </a:prstGeom>
+          <a:noFill/>
+        </p:spPr>
+        <p:txBody>
+          <a:bodyPr wrap="none">
+            <a:spAutoFit/>
+          </a:bodyPr>
+          <a:lstStyle/>
+          <a:p>
+            <a:r>
+              <a:rPr sz="1000">
+                <a:solidFill>
+                  <a:srgbClr val="5A6473"/>
+                </a:solidFill>
+              </a:rPr>
+              <a:t>Integrity holds even when rules are deliberately violated — database-level enforcement proven</a:t>
+            </a:r>
+          </a:p>
+        </p:txBody>
+      </p:sp>
+    </p:spTree>
+  </p:cSld>
+  <p:clrMapOvr>
+    <a:masterClrMapping/>
+  </p:clrMapOvr>
+</p:sld>
+</file>
+
+<file path=ppt/slides/slide12.xml><?xml version="1.0" encoding="utf-8"?>
+<p:sld xmlns:a="http://schemas.openxmlformats.org/drawingml/2006/main" xmlns:p="http://schemas.openxmlformats.org/presentationml/2006/main" xmlns:r="http://schemas.openxmlformats.org/officeDocument/2006/relationships">
+  <p:cSld>
+    <p:spTree>
+      <p:nvGrpSpPr>
+        <p:cNvPr id="1" name=""/>
+        <p:cNvGrpSpPr/>
+        <p:nvPr/>
+      </p:nvGrpSpPr>
+      <p:grpSpPr/>
+      <p:sp>
+        <p:nvSpPr>
+          <p:cNvPr id="2" name="Rectangle 1"/>
+          <p:cNvSpPr/>
+          <p:nvPr/>
+        </p:nvSpPr>
+        <p:spPr>
+          <a:xfrm>
+            <a:off x="0" y="0"/>
+            <a:ext cx="12191695" cy="6858000"/>
+          </a:xfrm>
+          <a:prstGeom prst="rect">
+            <a:avLst/>
+          </a:prstGeom>
+          <a:solidFill>
+            <a:srgbClr val="F2F5FA"/>
+          </a:solidFill>
+          <a:ln>
+            <a:noFill/>
+          </a:ln>
+          <a:effectLst/>
+        </p:spPr>
+        <p:style>
+          <a:lnRef idx="1">
+            <a:schemeClr val="accent1"/>
+          </a:lnRef>
+          <a:fillRef idx="3">
+            <a:schemeClr val="accent1"/>
+          </a:fillRef>
+          <a:effectRef idx="2">
+            <a:schemeClr val="accent1"/>
+          </a:effectRef>
+          <a:fontRef idx="minor">
+            <a:schemeClr val="lt1"/>
+          </a:fontRef>
+        </p:style>
+        <p:txBody>
+          <a:bodyPr rtlCol="0" anchor="ctr"/>
+          <a:lstStyle/>
+          <a:p>
+            <a:pPr algn="ctr"/>
+          </a:p>
+        </p:txBody>
+      </p:sp>
+      <p:sp>
+        <p:nvSpPr>
+          <p:cNvPr id="3" name="Rectangle 2"/>
+          <p:cNvSpPr/>
+          <p:nvPr/>
+        </p:nvSpPr>
+        <p:spPr>
+          <a:xfrm>
+            <a:off x="0" y="0"/>
+            <a:ext cx="12191695" cy="1051560"/>
+          </a:xfrm>
+          <a:prstGeom prst="rect">
+            <a:avLst/>
+          </a:prstGeom>
+          <a:solidFill>
+            <a:srgbClr val="0E1A2B"/>
+          </a:solidFill>
+          <a:ln>
+            <a:noFill/>
+          </a:ln>
+          <a:effectLst/>
+        </p:spPr>
+        <p:style>
+          <a:lnRef idx="1">
+            <a:schemeClr val="accent1"/>
+          </a:lnRef>
+          <a:fillRef idx="3">
+            <a:schemeClr val="accent1"/>
+          </a:fillRef>
+          <a:effectRef idx="2">
+            <a:schemeClr val="accent1"/>
+          </a:effectRef>
+          <a:fontRef idx="minor">
+            <a:schemeClr val="lt1"/>
+          </a:fontRef>
+        </p:style>
+        <p:txBody>
+          <a:bodyPr rtlCol="0" anchor="ctr" wrap="square" lIns="502920" tIns="109728"/>
+          <a:lstStyle/>
+          <a:p>
+            <a:pPr algn="ctr"/>
+            <a:r>
+              <a:rPr sz="1200" b="1">
+                <a:solidFill>
+                  <a:srgbClr val="35C4D5"/>
+                </a:solidFill>
+              </a:rPr>
+              <a:t>DOCUMENTATION</a:t>
+            </a:r>
+          </a:p>
+          <a:p>
+            <a:r>
+              <a:rPr sz="2600" b="1">
+                <a:solidFill>
+                  <a:srgbClr val="FFFFFF"/>
+                </a:solidFill>
+              </a:rPr>
+              <a:t>Documentation — Final Deliverables</a:t>
+            </a:r>
+          </a:p>
+        </p:txBody>
+      </p:sp>
+      <p:sp>
+        <p:nvSpPr>
+          <p:cNvPr id="4" name="Rectangle 3"/>
+          <p:cNvSpPr/>
+          <p:nvPr/>
+        </p:nvSpPr>
+        <p:spPr>
+          <a:xfrm>
+            <a:off x="0" y="1051560"/>
+            <a:ext cx="12191695" cy="50800"/>
+          </a:xfrm>
+          <a:prstGeom prst="rect">
+            <a:avLst/>
+          </a:prstGeom>
+          <a:solidFill>
+            <a:srgbClr val="35C4D5"/>
+          </a:solidFill>
+          <a:ln>
+            <a:noFill/>
+          </a:ln>
+          <a:effectLst/>
+        </p:spPr>
+        <p:style>
+          <a:lnRef idx="1">
+            <a:schemeClr val="accent1"/>
+          </a:lnRef>
+          <a:fillRef idx="3">
+            <a:schemeClr val="accent1"/>
+          </a:fillRef>
+          <a:effectRef idx="2">
+            <a:schemeClr val="accent1"/>
+          </a:effectRef>
+          <a:fontRef idx="minor">
+            <a:schemeClr val="lt1"/>
+          </a:fontRef>
+        </p:style>
+        <p:txBody>
+          <a:bodyPr rtlCol="0" anchor="ctr"/>
+          <a:lstStyle/>
+          <a:p>
+            <a:pPr algn="ctr"/>
+          </a:p>
+        </p:txBody>
+      </p:sp>
+      <p:sp>
+        <p:nvSpPr>
+          <p:cNvPr id="5" name="Rectangle 4"/>
+          <p:cNvSpPr/>
+          <p:nvPr/>
+        </p:nvSpPr>
+        <p:spPr>
+          <a:xfrm>
+            <a:off x="548640" y="1645920"/>
+            <a:ext cx="3544824" cy="2468880"/>
+          </a:xfrm>
+          <a:prstGeom prst="rect">
+            <a:avLst/>
+          </a:prstGeom>
+          <a:solidFill>
+            <a:srgbClr val="FFFFFF"/>
+          </a:solidFill>
+          <a:ln>
+            <a:solidFill>
+              <a:srgbClr val="DDE4EE"/>
+            </a:solidFill>
+          </a:ln>
+          <a:effectLst/>
+        </p:spPr>
+        <p:style>
+          <a:lnRef idx="1">
+            <a:schemeClr val="accent1"/>
+          </a:lnRef>
+          <a:fillRef idx="3">
+            <a:schemeClr val="accent1"/>
+          </a:fillRef>
+          <a:effectRef idx="2">
+            <a:schemeClr val="accent1"/>
+          </a:effectRef>
+          <a:fontRef idx="minor">
+            <a:schemeClr val="lt1"/>
+          </a:fontRef>
+        </p:style>
+        <p:txBody>
+          <a:bodyPr rtlCol="0" anchor="ctr" wrap="square" lIns="137160" tIns="109728"/>
+          <a:lstStyle/>
+          <a:p>
+            <a:pPr algn="ctr"/>
+            <a:r>
+              <a:rPr sz="1500" b="1">
+                <a:solidFill>
+                  <a:srgbClr val="1F6FEB"/>
+                </a:solidFill>
+              </a:rPr>
+              <a:t>sql/01_schema.sql</a:t>
+            </a:r>
+          </a:p>
+          <a:p>
+            <a:r>
+              <a:rPr sz="1150">
+                <a:solidFill>
+                  <a:srgbClr val="5A6473"/>
+                </a:solidFill>
+              </a:rPr>
+              <a:t>Complete 3NF DDL: 12 tables, PK/FK graph, CHECK &amp; UNIQUE constraints, 4 triggers, business rules BR-01…BR-04.</a:t>
+            </a:r>
+          </a:p>
+        </p:txBody>
+      </p:sp>
+      <p:sp>
+        <p:nvSpPr>
+          <p:cNvPr id="6" name="Rectangle 5"/>
+          <p:cNvSpPr/>
+          <p:nvPr/>
+        </p:nvSpPr>
+        <p:spPr>
+          <a:xfrm>
+            <a:off x="4322064" y="1645920"/>
+            <a:ext cx="3544824" cy="2468880"/>
+          </a:xfrm>
+          <a:prstGeom prst="rect">
+            <a:avLst/>
+          </a:prstGeom>
+          <a:solidFill>
+            <a:srgbClr val="FFFFFF"/>
+          </a:solidFill>
+          <a:ln>
+            <a:solidFill>
+              <a:srgbClr val="DDE4EE"/>
+            </a:solidFill>
+          </a:ln>
+          <a:effectLst/>
+        </p:spPr>
+        <p:style>
+          <a:lnRef idx="1">
+            <a:schemeClr val="accent1"/>
+          </a:lnRef>
+          <a:fillRef idx="3">
+            <a:schemeClr val="accent1"/>
+          </a:fillRef>
+          <a:effectRef idx="2">
+            <a:schemeClr val="accent1"/>
+          </a:effectRef>
+          <a:fontRef idx="minor">
+            <a:schemeClr val="lt1"/>
+          </a:fontRef>
+        </p:style>
+        <p:txBody>
+          <a:bodyPr rtlCol="0" anchor="ctr" wrap="square" lIns="137160" tIns="109728"/>
+          <a:lstStyle/>
+          <a:p>
+            <a:pPr algn="ctr"/>
+            <a:r>
+              <a:rPr sz="1500" b="1">
+                <a:solidFill>
+                  <a:srgbClr val="35C4D5"/>
+                </a:solidFill>
+              </a:rPr>
+              <a:t>sql/02–05 scripts</a:t>
+            </a:r>
+          </a:p>
+          <a:p>
+            <a:r>
+              <a:rPr sz="1150">
+                <a:solidFill>
+                  <a:srgbClr val="5A6473"/>
+                </a:solidFill>
+              </a:rPr>
+              <a:t>Seed dataset, 6 reporting views, 4 stored procedures and a 12-step demonstration script with README build instructions.</a:t>
+            </a:r>
+          </a:p>
+        </p:txBody>
+      </p:sp>
+      <p:sp>
+        <p:nvSpPr>
+          <p:cNvPr id="7" name="Rectangle 6"/>
+          <p:cNvSpPr/>
+          <p:nvPr/>
+        </p:nvSpPr>
+        <p:spPr>
+          <a:xfrm>
+            <a:off x="8095488" y="1645920"/>
+            <a:ext cx="3544824" cy="2468880"/>
+          </a:xfrm>
+          <a:prstGeom prst="rect">
+            <a:avLst/>
+          </a:prstGeom>
+          <a:solidFill>
+            <a:srgbClr val="FFFFFF"/>
+          </a:solidFill>
+          <a:ln>
+            <a:solidFill>
+              <a:srgbClr val="DDE4EE"/>
+            </a:solidFill>
+          </a:ln>
+          <a:effectLst/>
+        </p:spPr>
+        <p:style>
+          <a:lnRef idx="1">
+            <a:schemeClr val="accent1"/>
+          </a:lnRef>
+          <a:fillRef idx="3">
+            <a:schemeClr val="accent1"/>
+          </a:fillRef>
+          <a:effectRef idx="2">
+            <a:schemeClr val="accent1"/>
+          </a:effectRef>
+          <a:fontRef idx="minor">
+            <a:schemeClr val="lt1"/>
+          </a:fontRef>
+        </p:style>
+        <p:txBody>
+          <a:bodyPr rtlCol="0" anchor="ctr" wrap="square" lIns="137160" tIns="109728"/>
+          <a:lstStyle/>
+          <a:p>
+            <a:pPr algn="ctr"/>
+            <a:r>
+              <a:rPr sz="1500" b="1">
+                <a:solidFill>
+                  <a:srgbClr val="1EA97A"/>
+                </a:solidFill>
+              </a:rPr>
+              <a:t>Review decks 1–3</a:t>
+            </a:r>
+          </a:p>
+          <a:p>
+            <a:r>
+              <a:rPr sz="1150">
+                <a:solidFill>
+                  <a:srgbClr val="5A6473"/>
+                </a:solidFill>
+              </a:rPr>
+              <a:t>Requirement analysis → design &amp; implementation → final demonstration; full project narrative for evaluation.</a:t>
+            </a:r>
+          </a:p>
+        </p:txBody>
+      </p:sp>
+      <p:sp>
+        <p:nvSpPr>
+          <p:cNvPr id="8" name="TextBox 7"/>
+          <p:cNvSpPr txBox="1"/>
+          <p:nvPr/>
+        </p:nvSpPr>
+        <p:spPr>
+          <a:xfrm>
+            <a:off x="548640" y="4480560"/>
+            <a:ext cx="11064240" cy="411479"/>
+          </a:xfrm>
+          <a:prstGeom prst="rect">
+            <a:avLst/>
+          </a:prstGeom>
+          <a:noFill/>
+        </p:spPr>
+        <p:txBody>
+          <a:bodyPr wrap="square">
+            <a:spAutoFit/>
+          </a:bodyPr>
+          <a:lstStyle/>
+          <a:p>
+            <a:pPr>
+              <a:spcAft>
+                <a:spcPts val="600"/>
+              </a:spcAft>
+            </a:pPr>
+            <a:r>
+              <a:rPr sz="1400">
+                <a:solidFill>
+                  <a:srgbClr val="0E1A2B"/>
+                </a:solidFill>
+              </a:rPr>
+              <a:t>• README.md documents build order, requirements (MySQL 8), enforced business rules and verification results</a:t>
+            </a:r>
+          </a:p>
+          <a:p>
+            <a:pPr>
+              <a:spcAft>
+                <a:spcPts val="600"/>
+              </a:spcAft>
+            </a:pPr>
+            <a:r>
+              <a:rPr sz="1400">
+                <a:solidFill>
+                  <a:srgbClr val="0E1A2B"/>
+                </a:solidFill>
+              </a:rPr>
+              <a:t>• Verification evidence: schema + seed + views executed end-to-end; negative tests recorded with observed errors</a:t>
+            </a:r>
+          </a:p>
+        </p:txBody>
+      </p:sp>
+    </p:spTree>
+  </p:cSld>
+  <p:clrMapOvr>
+    <a:masterClrMapping/>
+  </p:clrMapOvr>
+</p:sld>
+</file>
+
+<file path=ppt/slides/slide13.xml><?xml version="1.0" encoding="utf-8"?>
+<p:sld xmlns:a="http://schemas.openxmlformats.org/drawingml/2006/main" xmlns:p="http://schemas.openxmlformats.org/presentationml/2006/main" xmlns:r="http://schemas.openxmlformats.org/officeDocument/2006/relationships">
+  <p:cSld>
+    <p:spTree>
+      <p:nvGrpSpPr>
+        <p:cNvPr id="1" name=""/>
+        <p:cNvGrpSpPr/>
+        <p:nvPr/>
+      </p:nvGrpSpPr>
+      <p:grpSpPr/>
+      <p:sp>
+        <p:nvSpPr>
+          <p:cNvPr id="2" name="Rectangle 1"/>
+          <p:cNvSpPr/>
+          <p:nvPr/>
+        </p:nvSpPr>
+        <p:spPr>
+          <a:xfrm>
+            <a:off x="0" y="0"/>
+            <a:ext cx="12191695" cy="6858000"/>
+          </a:xfrm>
+          <a:prstGeom prst="rect">
+            <a:avLst/>
+          </a:prstGeom>
+          <a:solidFill>
+            <a:srgbClr val="F2F5FA"/>
+          </a:solidFill>
+          <a:ln>
+            <a:noFill/>
+          </a:ln>
+          <a:effectLst/>
+        </p:spPr>
+        <p:style>
+          <a:lnRef idx="1">
+            <a:schemeClr val="accent1"/>
+          </a:lnRef>
+          <a:fillRef idx="3">
+            <a:schemeClr val="accent1"/>
+          </a:fillRef>
+          <a:effectRef idx="2">
+            <a:schemeClr val="accent1"/>
+          </a:effectRef>
+          <a:fontRef idx="minor">
+            <a:schemeClr val="lt1"/>
+          </a:fontRef>
+        </p:style>
+        <p:txBody>
+          <a:bodyPr rtlCol="0" anchor="ctr"/>
+          <a:lstStyle/>
+          <a:p>
+            <a:pPr algn="ctr"/>
+          </a:p>
+        </p:txBody>
+      </p:sp>
+      <p:sp>
+        <p:nvSpPr>
+          <p:cNvPr id="3" name="Rectangle 2"/>
+          <p:cNvSpPr/>
+          <p:nvPr/>
+        </p:nvSpPr>
+        <p:spPr>
+          <a:xfrm>
+            <a:off x="0" y="0"/>
+            <a:ext cx="12191695" cy="1051560"/>
+          </a:xfrm>
+          <a:prstGeom prst="rect">
+            <a:avLst/>
+          </a:prstGeom>
+          <a:solidFill>
+            <a:srgbClr val="0E1A2B"/>
+          </a:solidFill>
+          <a:ln>
+            <a:noFill/>
+          </a:ln>
+          <a:effectLst/>
+        </p:spPr>
+        <p:style>
+          <a:lnRef idx="1">
+            <a:schemeClr val="accent1"/>
+          </a:lnRef>
+          <a:fillRef idx="3">
+            <a:schemeClr val="accent1"/>
+          </a:fillRef>
+          <a:effectRef idx="2">
+            <a:schemeClr val="accent1"/>
+          </a:effectRef>
+          <a:fontRef idx="minor">
+            <a:schemeClr val="lt1"/>
+          </a:fontRef>
+        </p:style>
+        <p:txBody>
+          <a:bodyPr rtlCol="0" anchor="ctr" wrap="square" lIns="502920" tIns="109728"/>
+          <a:lstStyle/>
+          <a:p>
+            <a:pPr algn="ctr"/>
+            <a:r>
+              <a:rPr sz="1200" b="1">
+                <a:solidFill>
+                  <a:srgbClr val="35C4D5"/>
+                </a:solidFill>
+              </a:rPr>
+              <a:t>DOCUMENTATION</a:t>
+            </a:r>
+          </a:p>
+          <a:p>
+            <a:r>
+              <a:rPr sz="2600" b="1">
+                <a:solidFill>
+                  <a:srgbClr val="FFFFFF"/>
+                </a:solidFill>
+              </a:rPr>
+              <a:t>Testing Summary &amp; Reliability</a:t>
+            </a:r>
+          </a:p>
+        </p:txBody>
+      </p:sp>
+      <p:sp>
+        <p:nvSpPr>
+          <p:cNvPr id="4" name="Rectangle 3"/>
+          <p:cNvSpPr/>
+          <p:nvPr/>
+        </p:nvSpPr>
+        <p:spPr>
+          <a:xfrm>
+            <a:off x="0" y="1051560"/>
+            <a:ext cx="12191695" cy="50800"/>
+          </a:xfrm>
+          <a:prstGeom prst="rect">
+            <a:avLst/>
+          </a:prstGeom>
+          <a:solidFill>
+            <a:srgbClr val="35C4D5"/>
+          </a:solidFill>
+          <a:ln>
+            <a:noFill/>
+          </a:ln>
+          <a:effectLst/>
+        </p:spPr>
+        <p:style>
+          <a:lnRef idx="1">
+            <a:schemeClr val="accent1"/>
+          </a:lnRef>
+          <a:fillRef idx="3">
+            <a:schemeClr val="accent1"/>
+          </a:fillRef>
+          <a:effectRef idx="2">
+            <a:schemeClr val="accent1"/>
+          </a:effectRef>
+          <a:fontRef idx="minor">
+            <a:schemeClr val="lt1"/>
+          </a:fontRef>
+        </p:style>
+        <p:txBody>
+          <a:bodyPr rtlCol="0" anchor="ctr"/>
+          <a:lstStyle/>
+          <a:p>
+            <a:pPr algn="ctr"/>
+          </a:p>
+        </p:txBody>
+      </p:sp>
+      <p:graphicFrame>
+        <p:nvGraphicFramePr>
+          <p:cNvPr id="5" name="Table 4"/>
+          <p:cNvGraphicFramePr>
+            <a:graphicFrameLocks noGrp="1"/>
+          </p:cNvGraphicFramePr>
+          <p:nvPr/>
+        </p:nvGraphicFramePr>
+        <p:xfrm>
+          <a:off x="548640" y="1645920"/>
+          <a:ext cx="11064239" cy="2560320"/>
+        </p:xfrm>
+        <a:graphic>
+          <a:graphicData uri="http://schemas.openxmlformats.org/drawingml/2006/table">
+            <a:tbl>
+              <a:tblPr firstRow="1" bandRow="1">
+                <a:tableStyleId>{5C22544A-7EE6-4342-B048-85BDC9FD1C3A}</a:tableStyleId>
+              </a:tblPr>
+              <a:tblGrid>
+                <a:gridCol w="2928769"/>
+                <a:gridCol w="6833795"/>
+                <a:gridCol w="1301675"/>
+              </a:tblGrid>
+              <a:tr h="365760">
+                <a:tc>
+                  <a:txBody>
+                    <a:bodyPr/>
+                    <a:lstStyle/>
+                    <a:p>
+                      <a:r>
+                        <a:rPr sz="1250" b="1">
+                          <a:solidFill>
+                            <a:srgbClr val="FFFFFF"/>
+                          </a:solidFill>
+                        </a:rPr>
+                        <a:t>Test Area</a:t>
+                      </a:r>
+                    </a:p>
+                  </a:txBody>
+                  <a:tcPr>
+                    <a:solidFill>
+                      <a:srgbClr val="0E1A2B"/>
+                    </a:solidFill>
+                  </a:tcPr>
+                </a:tc>
+                <a:tc>
+                  <a:txBody>
+                    <a:bodyPr/>
+                    <a:lstStyle/>
+                    <a:p>
+                      <a:r>
+                        <a:rPr sz="1250" b="1">
+                          <a:solidFill>
+                            <a:srgbClr val="FFFFFF"/>
+                          </a:solidFill>
+                        </a:rPr>
+                        <a:t>Coverage</a:t>
+                      </a:r>
+                    </a:p>
+                  </a:txBody>
+                  <a:tcPr>
+                    <a:solidFill>
+                      <a:srgbClr val="0E1A2B"/>
+                    </a:solidFill>
+                  </a:tcPr>
+                </a:tc>
+                <a:tc>
+                  <a:txBody>
+                    <a:bodyPr/>
+                    <a:lstStyle/>
+                    <a:p>
+                      <a:r>
+                        <a:rPr sz="1250" b="1">
+                          <a:solidFill>
+                            <a:srgbClr val="FFFFFF"/>
+                          </a:solidFill>
+                        </a:rPr>
+                        <a:t>Status</a:t>
+                      </a:r>
+                    </a:p>
+                  </a:txBody>
+                  <a:tcPr>
+                    <a:solidFill>
+                      <a:srgbClr val="0E1A2B"/>
+                    </a:solidFill>
+                  </a:tcPr>
+                </a:tc>
+              </a:tr>
+              <a:tr h="365760">
+                <a:tc>
+                  <a:txBody>
+                    <a:bodyPr/>
+                    <a:lstStyle/>
+                    <a:p>
+                      <a:r>
+                        <a:rPr sz="1250">
+                          <a:solidFill>
+                            <a:srgbClr val="0E1A2B"/>
+                          </a:solidFill>
+                        </a:rPr>
+                        <a:t>Schema build</a:t>
+                      </a:r>
+                    </a:p>
+                  </a:txBody>
+                  <a:tcPr>
+                    <a:solidFill>
+                      <a:srgbClr val="FFFFFF"/>
+                    </a:solidFill>
+                  </a:tcPr>
+                </a:tc>
+                <a:tc>
+                  <a:txBody>
+                    <a:bodyPr/>
+                    <a:lstStyle/>
+                    <a:p>
+                      <a:r>
+                        <a:rPr sz="1250">
+                          <a:solidFill>
+                            <a:srgbClr val="0E1A2B"/>
+                          </a:solidFill>
+                        </a:rPr>
+                        <a:t>12/12 tables created; all constraints attached</a:t>
+                      </a:r>
+                    </a:p>
+                  </a:txBody>
+                  <a:tcPr>
+                    <a:solidFill>
+                      <a:srgbClr val="FFFFFF"/>
+                    </a:solidFill>
+                  </a:tcPr>
+                </a:tc>
+                <a:tc>
+                  <a:txBody>
+                    <a:bodyPr/>
+                    <a:lstStyle/>
+                    <a:p>
+                      <a:r>
+                        <a:rPr sz="1250">
+                          <a:solidFill>
+                            <a:srgbClr val="0E1A2B"/>
+                          </a:solidFill>
+                        </a:rPr>
+                        <a:t>PASS</a:t>
+                      </a:r>
+                    </a:p>
+                  </a:txBody>
+                  <a:tcPr>
+                    <a:solidFill>
+                      <a:srgbClr val="FFFFFF"/>
+                    </a:solidFill>
+                  </a:tcPr>
+                </a:tc>
+              </a:tr>
+              <a:tr h="365760">
+                <a:tc>
+                  <a:txBody>
+                    <a:bodyPr/>
+                    <a:lstStyle/>
+                    <a:p>
+                      <a:r>
+                        <a:rPr sz="1250">
+                          <a:solidFill>
+                            <a:srgbClr val="0E1A2B"/>
+                          </a:solidFill>
+                        </a:rPr>
+                        <a:t>Seed data</a:t>
+                      </a:r>
+                    </a:p>
+                  </a:txBody>
+                  <a:tcPr>
+                    <a:solidFill>
+                      <a:srgbClr val="EAF0F9"/>
+                    </a:solidFill>
+                  </a:tcPr>
+                </a:tc>
+                <a:tc>
+                  <a:txBody>
+                    <a:bodyPr/>
+                    <a:lstStyle/>
+                    <a:p>
+                      <a:r>
+                        <a:rPr sz="1250">
+                          <a:solidFill>
+                            <a:srgbClr val="0E1A2B"/>
+                          </a:solidFill>
+                        </a:rPr>
+                        <a:t>4 vendors, 6 products, 6 purchases, 6 licenses, 8 allocations loaded</a:t>
+                      </a:r>
+                    </a:p>
+                  </a:txBody>
+                  <a:tcPr>
+                    <a:solidFill>
+                      <a:srgbClr val="EAF0F9"/>
+                    </a:solidFill>
+                  </a:tcPr>
+                </a:tc>
+                <a:tc>
+                  <a:txBody>
+                    <a:bodyPr/>
+                    <a:lstStyle/>
+                    <a:p>
+                      <a:r>
+                        <a:rPr sz="1250">
+                          <a:solidFill>
+                            <a:srgbClr val="0E1A2B"/>
+                          </a:solidFill>
+                        </a:rPr>
+                        <a:t>PASS</a:t>
+                      </a:r>
+                    </a:p>
+                  </a:txBody>
+                  <a:tcPr>
+                    <a:solidFill>
+                      <a:srgbClr val="EAF0F9"/>
+                    </a:solidFill>
+                  </a:tcPr>
+                </a:tc>
+              </a:tr>
+              <a:tr h="365760">
+                <a:tc>
+                  <a:txBody>
+                    <a:bodyPr/>
+                    <a:lstStyle/>
+                    <a:p>
+                      <a:r>
+                        <a:rPr sz="1250">
+                          <a:solidFill>
+                            <a:srgbClr val="0E1A2B"/>
+                          </a:solidFill>
+                        </a:rPr>
+                        <a:t>Reporting views</a:t>
+                      </a:r>
+                    </a:p>
+                  </a:txBody>
+                  <a:tcPr>
+                    <a:solidFill>
+                      <a:srgbClr val="FFFFFF"/>
+                    </a:solidFill>
+                  </a:tcPr>
+                </a:tc>
+                <a:tc>
+                  <a:txBody>
+                    <a:bodyPr/>
+                    <a:lstStyle/>
+                    <a:p>
+                      <a:r>
+                        <a:rPr sz="1250">
+                          <a:solidFill>
+                            <a:srgbClr val="0E1A2B"/>
+                          </a:solidFill>
+                        </a:rPr>
+                        <a:t>6/6 views return correct aggregates vs manual checks</a:t>
+                      </a:r>
+                    </a:p>
+                  </a:txBody>
+                  <a:tcPr>
+                    <a:solidFill>
+                      <a:srgbClr val="FFFFFF"/>
+                    </a:solidFill>
+                  </a:tcPr>
+                </a:tc>
+                <a:tc>
+                  <a:txBody>
+                    <a:bodyPr/>
+                    <a:lstStyle/>
+                    <a:p>
+                      <a:r>
+                        <a:rPr sz="1250">
+                          <a:solidFill>
+                            <a:srgbClr val="0E1A2B"/>
+                          </a:solidFill>
+                        </a:rPr>
+                        <a:t>PASS</a:t>
+                      </a:r>
+                    </a:p>
+                  </a:txBody>
+                  <a:tcPr>
+                    <a:solidFill>
+                      <a:srgbClr val="FFFFFF"/>
+                    </a:solidFill>
+                  </a:tcPr>
+                </a:tc>
+              </a:tr>
+              <a:tr h="365760">
+                <a:tc>
+                  <a:txBody>
+                    <a:bodyPr/>
+                    <a:lstStyle/>
+                    <a:p>
+                      <a:r>
+                        <a:rPr sz="1250">
+                          <a:solidFill>
+                            <a:srgbClr val="0E1A2B"/>
+                          </a:solidFill>
+                        </a:rPr>
+                        <a:t>Workflows</a:t>
+                      </a:r>
+                    </a:p>
+                  </a:txBody>
+                  <a:tcPr>
+                    <a:solidFill>
+                      <a:srgbClr val="EAF0F9"/>
+                    </a:solidFill>
+                  </a:tcPr>
+                </a:tc>
+                <a:tc>
+                  <a:txBody>
+                    <a:bodyPr/>
+                    <a:lstStyle/>
+                    <a:p>
+                      <a:r>
+                        <a:rPr sz="1250">
+                          <a:solidFill>
+                            <a:srgbClr val="0E1A2B"/>
+                          </a:solidFill>
+                        </a:rPr>
+                        <a:t>Allocate / reclaim / renew transactions commit or roll back cleanly</a:t>
+                      </a:r>
+                    </a:p>
+                  </a:txBody>
+                  <a:tcPr>
+                    <a:solidFill>
+                      <a:srgbClr val="EAF0F9"/>
+                    </a:solidFill>
+                  </a:tcPr>
+                </a:tc>
+                <a:tc>
+                  <a:txBody>
+                    <a:bodyPr/>
+                    <a:lstStyle/>
+                    <a:p>
+                      <a:r>
+                        <a:rPr sz="1250">
+                          <a:solidFill>
+                            <a:srgbClr val="0E1A2B"/>
+                          </a:solidFill>
+                        </a:rPr>
+                        <a:t>PASS</a:t>
+                      </a:r>
+                    </a:p>
+                  </a:txBody>
+                  <a:tcPr>
+                    <a:solidFill>
+                      <a:srgbClr val="EAF0F9"/>
+                    </a:solidFill>
+                  </a:tcPr>
+                </a:tc>
+              </a:tr>
+              <a:tr h="365760">
+                <a:tc>
+                  <a:txBody>
+                    <a:bodyPr/>
+                    <a:lstStyle/>
+                    <a:p>
+                      <a:r>
+                        <a:rPr sz="1250">
+                          <a:solidFill>
+                            <a:srgbClr val="0E1A2B"/>
+                          </a:solidFill>
+                        </a:rPr>
+                        <a:t>Negative tests</a:t>
+                      </a:r>
+                    </a:p>
+                  </a:txBody>
+                  <a:tcPr>
+                    <a:solidFill>
+                      <a:srgbClr val="FFFFFF"/>
+                    </a:solidFill>
+                  </a:tcPr>
+                </a:tc>
+                <a:tc>
+                  <a:txBody>
+                    <a:bodyPr/>
+                    <a:lstStyle/>
+                    <a:p>
+                      <a:r>
+                        <a:rPr sz="1250">
+                          <a:solidFill>
+                            <a:srgbClr val="0E1A2B"/>
+                          </a:solidFill>
+                        </a:rPr>
+                        <a:t>Seat limit, expiry, date-order, duplicate-key violations all blocked</a:t>
+                      </a:r>
+                    </a:p>
+                  </a:txBody>
+                  <a:tcPr>
+                    <a:solidFill>
+                      <a:srgbClr val="FFFFFF"/>
+                    </a:solidFill>
+                  </a:tcPr>
+                </a:tc>
+                <a:tc>
+                  <a:txBody>
+                    <a:bodyPr/>
+                    <a:lstStyle/>
+                    <a:p>
+                      <a:r>
+                        <a:rPr sz="1250">
+                          <a:solidFill>
+                            <a:srgbClr val="0E1A2B"/>
+                          </a:solidFill>
+                        </a:rPr>
+                        <a:t>PASS</a:t>
+                      </a:r>
+                    </a:p>
+                  </a:txBody>
+                  <a:tcPr>
+                    <a:solidFill>
+                      <a:srgbClr val="FFFFFF"/>
+                    </a:solidFill>
+                  </a:tcPr>
+                </a:tc>
+              </a:tr>
+              <a:tr h="365760">
+                <a:tc>
+                  <a:txBody>
+                    <a:bodyPr/>
+                    <a:lstStyle/>
+                    <a:p>
+                      <a:r>
+                        <a:rPr sz="1250">
+                          <a:solidFill>
+                            <a:srgbClr val="0E1A2B"/>
+                          </a:solidFill>
+                        </a:rPr>
+                        <a:t>Backups</a:t>
+                      </a:r>
+                    </a:p>
+                  </a:txBody>
+                  <a:tcPr>
+                    <a:solidFill>
+                      <a:srgbClr val="EAF0F9"/>
+                    </a:solidFill>
+                  </a:tcPr>
+                </a:tc>
+                <a:tc>
+                  <a:txBody>
+                    <a:bodyPr/>
+                    <a:lstStyle/>
+                    <a:p>
+                      <a:r>
+                        <a:rPr sz="1250">
+                          <a:solidFill>
+                            <a:srgbClr val="0E1A2B"/>
+                          </a:solidFill>
+                        </a:rPr>
+                        <a:t>mysqldump scheduled backup procedure documented in README</a:t>
+                      </a:r>
+                    </a:p>
+                  </a:txBody>
+                  <a:tcPr>
+                    <a:solidFill>
+                      <a:srgbClr val="EAF0F9"/>
+                    </a:solidFill>
+                  </a:tcPr>
+                </a:tc>
+                <a:tc>
+                  <a:txBody>
+                    <a:bodyPr/>
+                    <a:lstStyle/>
+                    <a:p>
+                      <a:r>
+                        <a:rPr sz="1250">
+                          <a:solidFill>
+                            <a:srgbClr val="0E1A2B"/>
+                          </a:solidFill>
+                        </a:rPr>
+                        <a:t>PLANNED</a:t>
+                      </a:r>
+                    </a:p>
+                  </a:txBody>
+                  <a:tcPr>
+                    <a:solidFill>
+                      <a:srgbClr val="EAF0F9"/>
+                    </a:solidFill>
+                  </a:tcPr>
+                </a:tc>
+              </a:tr>
+            </a:tbl>
+          </a:graphicData>
+        </a:graphic>
+      </p:graphicFrame>
+      <p:sp>
+        <p:nvSpPr>
+          <p:cNvPr id="6" name="TextBox 5"/>
+          <p:cNvSpPr txBox="1"/>
+          <p:nvPr/>
+        </p:nvSpPr>
+        <p:spPr>
+          <a:xfrm>
+            <a:off x="548640" y="6355080"/>
+            <a:ext cx="11064240" cy="365760"/>
+          </a:xfrm>
+          <a:prstGeom prst="rect">
+            <a:avLst/>
+          </a:prstGeom>
+          <a:noFill/>
+        </p:spPr>
+        <p:txBody>
+          <a:bodyPr wrap="none">
+            <a:spAutoFit/>
+          </a:bodyPr>
+          <a:lstStyle/>
+          <a:p>
+            <a:r>
+              <a:rPr sz="1000">
+                <a:solidFill>
+                  <a:srgbClr val="5A6473"/>
+                </a:solidFill>
+              </a:rPr>
+              <a:t>Reports return in well under a second on the demo dataset — NFR performance target met</a:t>
+            </a:r>
+          </a:p>
+        </p:txBody>
+      </p:sp>
+    </p:spTree>
+  </p:cSld>
+  <p:clrMapOvr>
+    <a:masterClrMapping/>
+  </p:clrMapOvr>
+</p:sld>
+</file>
+
+<file path=ppt/slides/slide14.xml><?xml version="1.0" encoding="utf-8"?>
+<p:sld xmlns:a="http://schemas.openxmlformats.org/drawingml/2006/main" xmlns:p="http://schemas.openxmlformats.org/presentationml/2006/main" xmlns:r="http://schemas.openxmlformats.org/officeDocument/2006/relationships">
+  <p:cSld>
+    <p:spTree>
+      <p:nvGrpSpPr>
+        <p:cNvPr id="1" name=""/>
+        <p:cNvGrpSpPr/>
+        <p:nvPr/>
+      </p:nvGrpSpPr>
+      <p:grpSpPr/>
+      <p:sp>
+        <p:nvSpPr>
+          <p:cNvPr id="2" name="Rectangle 1"/>
+          <p:cNvSpPr/>
+          <p:nvPr/>
+        </p:nvSpPr>
+        <p:spPr>
+          <a:xfrm>
+            <a:off x="0" y="0"/>
+            <a:ext cx="12191695" cy="6858000"/>
+          </a:xfrm>
+          <a:prstGeom prst="rect">
+            <a:avLst/>
+          </a:prstGeom>
+          <a:solidFill>
+            <a:srgbClr val="F2F5FA"/>
+          </a:solidFill>
+          <a:ln>
+            <a:noFill/>
+          </a:ln>
+          <a:effectLst/>
+        </p:spPr>
+        <p:style>
+          <a:lnRef idx="1">
+            <a:schemeClr val="accent1"/>
+          </a:lnRef>
+          <a:fillRef idx="3">
+            <a:schemeClr val="accent1"/>
+          </a:fillRef>
+          <a:effectRef idx="2">
+            <a:schemeClr val="accent1"/>
+          </a:effectRef>
+          <a:fontRef idx="minor">
+            <a:schemeClr val="lt1"/>
+          </a:fontRef>
+        </p:style>
+        <p:txBody>
+          <a:bodyPr rtlCol="0" anchor="ctr"/>
+          <a:lstStyle/>
+          <a:p>
+            <a:pPr algn="ctr"/>
+          </a:p>
+        </p:txBody>
+      </p:sp>
+      <p:sp>
+        <p:nvSpPr>
+          <p:cNvPr id="3" name="Rectangle 2"/>
+          <p:cNvSpPr/>
+          <p:nvPr/>
+        </p:nvSpPr>
+        <p:spPr>
+          <a:xfrm>
+            <a:off x="0" y="0"/>
+            <a:ext cx="12191695" cy="1051560"/>
+          </a:xfrm>
+          <a:prstGeom prst="rect">
+            <a:avLst/>
+          </a:prstGeom>
+          <a:solidFill>
+            <a:srgbClr val="0E1A2B"/>
+          </a:solidFill>
+          <a:ln>
+            <a:noFill/>
+          </a:ln>
+          <a:effectLst/>
+        </p:spPr>
+        <p:style>
+          <a:lnRef idx="1">
+            <a:schemeClr val="accent1"/>
+          </a:lnRef>
+          <a:fillRef idx="3">
+            <a:schemeClr val="accent1"/>
+          </a:fillRef>
+          <a:effectRef idx="2">
+            <a:schemeClr val="accent1"/>
+          </a:effectRef>
+          <a:fontRef idx="minor">
+            <a:schemeClr val="lt1"/>
+          </a:fontRef>
+        </p:style>
+        <p:txBody>
+          <a:bodyPr rtlCol="0" anchor="ctr" wrap="square" lIns="502920" tIns="109728"/>
+          <a:lstStyle/>
+          <a:p>
+            <a:pPr algn="ctr"/>
+            <a:r>
+              <a:rPr sz="1200" b="1">
+                <a:solidFill>
+                  <a:srgbClr val="35C4D5"/>
+                </a:solidFill>
+              </a:rPr>
+              <a:t>CONCLUSION</a:t>
+            </a:r>
+          </a:p>
+          <a:p>
+            <a:r>
+              <a:rPr sz="2600" b="1">
+                <a:solidFill>
+                  <a:srgbClr val="FFFFFF"/>
+                </a:solidFill>
+              </a:rPr>
+              <a:t>Conclusion &amp; Future Scope</a:t>
+            </a:r>
+          </a:p>
+        </p:txBody>
+      </p:sp>
+      <p:sp>
+        <p:nvSpPr>
+          <p:cNvPr id="4" name="Rectangle 3"/>
+          <p:cNvSpPr/>
+          <p:nvPr/>
+        </p:nvSpPr>
+        <p:spPr>
+          <a:xfrm>
+            <a:off x="0" y="1051560"/>
+            <a:ext cx="12191695" cy="50800"/>
+          </a:xfrm>
+          <a:prstGeom prst="rect">
+            <a:avLst/>
+          </a:prstGeom>
+          <a:solidFill>
+            <a:srgbClr val="35C4D5"/>
+          </a:solidFill>
+          <a:ln>
+            <a:noFill/>
+          </a:ln>
+          <a:effectLst/>
+        </p:spPr>
+        <p:style>
+          <a:lnRef idx="1">
+            <a:schemeClr val="accent1"/>
+          </a:lnRef>
+          <a:fillRef idx="3">
+            <a:schemeClr val="accent1"/>
+          </a:fillRef>
+          <a:effectRef idx="2">
+            <a:schemeClr val="accent1"/>
+          </a:effectRef>
+          <a:fontRef idx="minor">
+            <a:schemeClr val="lt1"/>
+          </a:fontRef>
+        </p:style>
+        <p:txBody>
+          <a:bodyPr rtlCol="0" anchor="ctr"/>
+          <a:lstStyle/>
+          <a:p>
+            <a:pPr algn="ctr"/>
+          </a:p>
+        </p:txBody>
+      </p:sp>
+      <p:sp>
+        <p:nvSpPr>
+          <p:cNvPr id="5" name="TextBox 4"/>
+          <p:cNvSpPr txBox="1"/>
+          <p:nvPr/>
+        </p:nvSpPr>
+        <p:spPr>
+          <a:xfrm>
+            <a:off x="548640" y="1371600"/>
+            <a:ext cx="11064240" cy="3520439"/>
+          </a:xfrm>
+          <a:prstGeom prst="rect">
+            <a:avLst/>
+          </a:prstGeom>
+          <a:noFill/>
+        </p:spPr>
+        <p:txBody>
+          <a:bodyPr wrap="square">
+            <a:spAutoFit/>
+          </a:bodyPr>
+          <a:lstStyle/>
+          <a:p>
+            <a:pPr>
+              <a:spcAft>
+                <a:spcPts val="800"/>
+              </a:spcAft>
+            </a:pPr>
+            <a:r>
+              <a:rPr sz="1500">
+                <a:solidFill>
+                  <a:srgbClr val="0E1A2B"/>
+                </a:solidFill>
+              </a:rPr>
+              <a:t>• Centralized single source of truth for every license, subscription, allocation and renewal across departments</a:t>
+            </a:r>
+          </a:p>
+          <a:p>
+            <a:pPr>
+              <a:spcAft>
+                <a:spcPts val="800"/>
+              </a:spcAft>
+            </a:pPr>
+            <a:r>
+              <a:rPr sz="1500">
+                <a:solidFill>
+                  <a:srgbClr val="0E1A2B"/>
+                </a:solidFill>
+              </a:rPr>
+              <a:t>• Business rules enforced inside the database — unique keys, seat limits, valid periods and ACID workflows</a:t>
+            </a:r>
+          </a:p>
+          <a:p>
+            <a:pPr>
+              <a:spcAft>
+                <a:spcPts val="800"/>
+              </a:spcAft>
+            </a:pPr>
+            <a:r>
+              <a:rPr sz="1500">
+                <a:solidFill>
+                  <a:srgbClr val="0E1A2B"/>
+                </a:solidFill>
+              </a:rPr>
+              <a:t>• Proactive monitoring: expiry bands, automated compliance sweeps and dated audit history</a:t>
+            </a:r>
+          </a:p>
+          <a:p>
+            <a:pPr>
+              <a:spcAft>
+                <a:spcPts val="800"/>
+              </a:spcAft>
+            </a:pPr>
+            <a:r>
+              <a:rPr sz="1500">
+                <a:solidFill>
+                  <a:srgbClr val="0E1A2B"/>
+                </a:solidFill>
+              </a:rPr>
+              <a:t>• Decision support: utilization percentages, department usage and lifetime vendor spend for renewal planning</a:t>
+            </a:r>
+          </a:p>
+        </p:txBody>
+      </p:sp>
+      <p:sp>
+        <p:nvSpPr>
+          <p:cNvPr id="6" name="TextBox 5"/>
+          <p:cNvSpPr txBox="1"/>
+          <p:nvPr/>
+        </p:nvSpPr>
+        <p:spPr>
+          <a:xfrm>
+            <a:off x="548640" y="4206240"/>
+            <a:ext cx="11064240" cy="685800"/>
+          </a:xfrm>
+          <a:prstGeom prst="rect">
+            <a:avLst/>
+          </a:prstGeom>
+          <a:noFill/>
+        </p:spPr>
+        <p:txBody>
+          <a:bodyPr wrap="square">
+            <a:spAutoFit/>
+          </a:bodyPr>
+          <a:lstStyle/>
+          <a:p>
+            <a:pPr>
+              <a:spcAft>
+                <a:spcPts val="600"/>
+              </a:spcAft>
+            </a:pPr>
+            <a:r>
+              <a:rPr sz="1400">
+                <a:solidFill>
+                  <a:srgbClr val="0E1A2B"/>
+                </a:solidFill>
+              </a:rPr>
+              <a:t>• Web dashboard for department managers and end users on top of the database layer</a:t>
+            </a:r>
+          </a:p>
+          <a:p>
+            <a:pPr>
+              <a:spcAft>
+                <a:spcPts val="600"/>
+              </a:spcAft>
+            </a:pPr>
+            <a:r>
+              <a:rPr sz="1400">
+                <a:solidFill>
+                  <a:srgbClr val="0E1A2B"/>
+                </a:solidFill>
+              </a:rPr>
+              <a:t>• Email/Slack alerts for CRITICAL expiry band; RBAC integration with campus SSO</a:t>
+            </a:r>
+          </a:p>
+          <a:p>
+            <a:pPr>
+              <a:spcAft>
+                <a:spcPts val="600"/>
+              </a:spcAft>
+            </a:pPr>
+            <a:r>
+              <a:rPr sz="1400">
+                <a:solidFill>
+                  <a:srgbClr val="0E1A2B"/>
+                </a:solidFill>
+              </a:rPr>
+              <a:t>• SaaS API ingestion for automatic usage and true-up reconciliation</a:t>
+            </a:r>
+          </a:p>
+        </p:txBody>
+      </p:sp>
+      <p:sp>
+        <p:nvSpPr>
+          <p:cNvPr id="7" name="TextBox 6"/>
+          <p:cNvSpPr txBox="1"/>
+          <p:nvPr/>
+        </p:nvSpPr>
+        <p:spPr>
+          <a:xfrm>
+            <a:off x="548640" y="6355080"/>
+            <a:ext cx="11064240" cy="365760"/>
+          </a:xfrm>
+          <a:prstGeom prst="rect">
+            <a:avLst/>
+          </a:prstGeom>
+          <a:noFill/>
+        </p:spPr>
+        <p:txBody>
+          <a:bodyPr wrap="none">
+            <a:spAutoFit/>
+          </a:bodyPr>
+          <a:lstStyle/>
+          <a:p>
+            <a:r>
+              <a:rPr sz="1000">
+                <a:solidFill>
+                  <a:srgbClr val="5A6473"/>
+                </a:solidFill>
+              </a:rPr>
+              <a:t>Thank you — Questions? · Jampana Naga Satya Sai Rishvarma · 25WU0102105 · Woxsen University</a:t>
+            </a:r>
+          </a:p>
+        </p:txBody>
+      </p:sp>
+    </p:spTree>
+  </p:cSld>
+  <p:clrMapOvr>
+    <a:masterClrMapping/>
+  </p:clrMapOvr>
+</p:sld>
+</file>
+
 <file path=ppt/slides/slide2.xml><?xml version="1.0" encoding="utf-8"?>
 <p:sld xmlns:a="http://schemas.openxmlformats.org/drawingml/2006/main" xmlns:p="http://schemas.openxmlformats.org/presentationml/2006/main" xmlns:r="http://schemas.openxmlformats.org/officeDocument/2006/relationships">
   <p:cSld>
@@ -5090,7 +7604,7 @@
         <p:spPr>
           <a:xfrm>
             <a:off x="548640" y="4480560"/>
-            <a:ext cx="11064240" cy="5120640"/>
+            <a:ext cx="11064240" cy="411479"/>
           </a:xfrm>
           <a:prstGeom prst="rect">
             <a:avLst/>
@@ -5243,7 +7757,7 @@
                   <a:srgbClr val="35C4D5"/>
                 </a:solidFill>
               </a:rPr>
-              <a:t>FINAL DEMONSTRATION</a:t>
+              <a:t>IMPLEMENTATION</a:t>
             </a:r>
           </a:p>
           <a:p>
@@ -5253,7 +7767,778 @@
                   <a:srgbClr val="FFFFFF"/>
                 </a:solidFill>
               </a:rPr>
-              <a:t>Business Rule Validation — Negative Test Evidence</a:t>
+              <a:t>Implementation — Architecture &amp; Build</a:t>
+            </a:r>
+          </a:p>
+        </p:txBody>
+      </p:sp>
+      <p:sp>
+        <p:nvSpPr>
+          <p:cNvPr id="4" name="Rectangle 3"/>
+          <p:cNvSpPr/>
+          <p:nvPr/>
+        </p:nvSpPr>
+        <p:spPr>
+          <a:xfrm>
+            <a:off x="0" y="1051560"/>
+            <a:ext cx="12191695" cy="50800"/>
+          </a:xfrm>
+          <a:prstGeom prst="rect">
+            <a:avLst/>
+          </a:prstGeom>
+          <a:solidFill>
+            <a:srgbClr val="35C4D5"/>
+          </a:solidFill>
+          <a:ln>
+            <a:noFill/>
+          </a:ln>
+          <a:effectLst/>
+        </p:spPr>
+        <p:style>
+          <a:lnRef idx="1">
+            <a:schemeClr val="accent1"/>
+          </a:lnRef>
+          <a:fillRef idx="3">
+            <a:schemeClr val="accent1"/>
+          </a:fillRef>
+          <a:effectRef idx="2">
+            <a:schemeClr val="accent1"/>
+          </a:effectRef>
+          <a:fontRef idx="minor">
+            <a:schemeClr val="lt1"/>
+          </a:fontRef>
+        </p:style>
+        <p:txBody>
+          <a:bodyPr rtlCol="0" anchor="ctr"/>
+          <a:lstStyle/>
+          <a:p>
+            <a:pPr algn="ctr"/>
+          </a:p>
+        </p:txBody>
+      </p:sp>
+      <p:sp>
+        <p:nvSpPr>
+          <p:cNvPr id="5" name="Rectangle 4"/>
+          <p:cNvSpPr/>
+          <p:nvPr/>
+        </p:nvSpPr>
+        <p:spPr>
+          <a:xfrm>
+            <a:off x="548640" y="1463040"/>
+            <a:ext cx="3544824" cy="2057400"/>
+          </a:xfrm>
+          <a:prstGeom prst="rect">
+            <a:avLst/>
+          </a:prstGeom>
+          <a:solidFill>
+            <a:srgbClr val="FFFFFF"/>
+          </a:solidFill>
+          <a:ln>
+            <a:solidFill>
+              <a:srgbClr val="DDE4EE"/>
+            </a:solidFill>
+          </a:ln>
+          <a:effectLst/>
+        </p:spPr>
+        <p:style>
+          <a:lnRef idx="1">
+            <a:schemeClr val="accent1"/>
+          </a:lnRef>
+          <a:fillRef idx="3">
+            <a:schemeClr val="accent1"/>
+          </a:fillRef>
+          <a:effectRef idx="2">
+            <a:schemeClr val="accent1"/>
+          </a:effectRef>
+          <a:fontRef idx="minor">
+            <a:schemeClr val="lt1"/>
+          </a:fontRef>
+        </p:style>
+        <p:txBody>
+          <a:bodyPr rtlCol="0" anchor="ctr" wrap="square" lIns="137160" tIns="109728"/>
+          <a:lstStyle/>
+          <a:p>
+            <a:pPr algn="ctr"/>
+            <a:r>
+              <a:rPr sz="1500" b="1">
+                <a:solidFill>
+                  <a:srgbClr val="1F6FEB"/>
+                </a:solidFill>
+              </a:rPr>
+              <a:t>Database Layer · MySQL 8</a:t>
+            </a:r>
+          </a:p>
+          <a:p>
+            <a:r>
+              <a:rPr sz="1150">
+                <a:solidFill>
+                  <a:srgbClr val="5A6473"/>
+                </a:solidFill>
+              </a:rPr>
+              <a:t>12-table 3NF schema (license_mgmt): PK/FK graph, CHECK &amp; UNIQUE constraints, ENUM domains, 4 triggers enforcing BR-01…BR-04 on every write.</a:t>
+            </a:r>
+          </a:p>
+        </p:txBody>
+      </p:sp>
+      <p:sp>
+        <p:nvSpPr>
+          <p:cNvPr id="6" name="Rectangle 5"/>
+          <p:cNvSpPr/>
+          <p:nvPr/>
+        </p:nvSpPr>
+        <p:spPr>
+          <a:xfrm>
+            <a:off x="4322064" y="1463040"/>
+            <a:ext cx="3544824" cy="2057400"/>
+          </a:xfrm>
+          <a:prstGeom prst="rect">
+            <a:avLst/>
+          </a:prstGeom>
+          <a:solidFill>
+            <a:srgbClr val="FFFFFF"/>
+          </a:solidFill>
+          <a:ln>
+            <a:solidFill>
+              <a:srgbClr val="DDE4EE"/>
+            </a:solidFill>
+          </a:ln>
+          <a:effectLst/>
+        </p:spPr>
+        <p:style>
+          <a:lnRef idx="1">
+            <a:schemeClr val="accent1"/>
+          </a:lnRef>
+          <a:fillRef idx="3">
+            <a:schemeClr val="accent1"/>
+          </a:fillRef>
+          <a:effectRef idx="2">
+            <a:schemeClr val="accent1"/>
+          </a:effectRef>
+          <a:fontRef idx="minor">
+            <a:schemeClr val="lt1"/>
+          </a:fontRef>
+        </p:style>
+        <p:txBody>
+          <a:bodyPr rtlCol="0" anchor="ctr" wrap="square" lIns="137160" tIns="109728"/>
+          <a:lstStyle/>
+          <a:p>
+            <a:pPr algn="ctr"/>
+            <a:r>
+              <a:rPr sz="1500" b="1">
+                <a:solidFill>
+                  <a:srgbClr val="35C4D5"/>
+                </a:solidFill>
+              </a:rPr>
+              <a:t>Logic Layer · SQL Objects</a:t>
+            </a:r>
+          </a:p>
+          <a:p>
+            <a:r>
+              <a:rPr sz="1150">
+                <a:solidFill>
+                  <a:srgbClr val="5A6473"/>
+                </a:solidFill>
+              </a:rPr>
+              <a:t>6 reporting views (utilization, department, expiry, compliance, vendor spend, renewals) + 5 stored procedures: allocate, reclaim, renew, compliance sweep, status sync — all ACID.</a:t>
+            </a:r>
+          </a:p>
+        </p:txBody>
+      </p:sp>
+      <p:sp>
+        <p:nvSpPr>
+          <p:cNvPr id="7" name="Rectangle 6"/>
+          <p:cNvSpPr/>
+          <p:nvPr/>
+        </p:nvSpPr>
+        <p:spPr>
+          <a:xfrm>
+            <a:off x="8095488" y="1463040"/>
+            <a:ext cx="3544824" cy="2057400"/>
+          </a:xfrm>
+          <a:prstGeom prst="rect">
+            <a:avLst/>
+          </a:prstGeom>
+          <a:solidFill>
+            <a:srgbClr val="FFFFFF"/>
+          </a:solidFill>
+          <a:ln>
+            <a:solidFill>
+              <a:srgbClr val="DDE4EE"/>
+            </a:solidFill>
+          </a:ln>
+          <a:effectLst/>
+        </p:spPr>
+        <p:style>
+          <a:lnRef idx="1">
+            <a:schemeClr val="accent1"/>
+          </a:lnRef>
+          <a:fillRef idx="3">
+            <a:schemeClr val="accent1"/>
+          </a:fillRef>
+          <a:effectRef idx="2">
+            <a:schemeClr val="accent1"/>
+          </a:effectRef>
+          <a:fontRef idx="minor">
+            <a:schemeClr val="lt1"/>
+          </a:fontRef>
+        </p:style>
+        <p:txBody>
+          <a:bodyPr rtlCol="0" anchor="ctr" wrap="square" lIns="137160" tIns="109728"/>
+          <a:lstStyle/>
+          <a:p>
+            <a:pPr algn="ctr"/>
+            <a:r>
+              <a:rPr sz="1500" b="1">
+                <a:solidFill>
+                  <a:srgbClr val="1EA97A"/>
+                </a:solidFill>
+              </a:rPr>
+              <a:t>Application Layer · Streamlit</a:t>
+            </a:r>
+          </a:p>
+          <a:p>
+            <a:r>
+              <a:rPr sz="1150">
+                <a:solidFill>
+                  <a:srgbClr val="5A6473"/>
+                </a:solidFill>
+              </a:rPr>
+              <a:t>Python UI over the same views and procedures; dual engine (MySQL or bundled SQLite demo) so the prototype runs with zero external setup.</a:t>
+            </a:r>
+          </a:p>
+        </p:txBody>
+      </p:sp>
+      <p:graphicFrame>
+        <p:nvGraphicFramePr>
+          <p:cNvPr id="8" name="Table 7"/>
+          <p:cNvGraphicFramePr>
+            <a:graphicFrameLocks noGrp="1"/>
+          </p:cNvGraphicFramePr>
+          <p:nvPr/>
+        </p:nvGraphicFramePr>
+        <p:xfrm>
+          <a:off x="548640" y="3794760"/>
+          <a:ext cx="11064238" cy="2926080"/>
+        </p:xfrm>
+        <a:graphic>
+          <a:graphicData uri="http://schemas.openxmlformats.org/drawingml/2006/table">
+            <a:tbl>
+              <a:tblPr firstRow="1" bandRow="1">
+                <a:tableStyleId>{5C22544A-7EE6-4342-B048-85BDC9FD1C3A}</a:tableStyleId>
+              </a:tblPr>
+              <a:tblGrid>
+                <a:gridCol w="3688079"/>
+                <a:gridCol w="7376159"/>
+              </a:tblGrid>
+              <a:tr h="365760">
+                <a:tc>
+                  <a:txBody>
+                    <a:bodyPr/>
+                    <a:lstStyle/>
+                    <a:p>
+                      <a:r>
+                        <a:rPr sz="1000" b="1">
+                          <a:solidFill>
+                            <a:srgbClr val="FFFFFF"/>
+                          </a:solidFill>
+                        </a:rPr>
+                        <a:t>Artifact</a:t>
+                      </a:r>
+                    </a:p>
+                  </a:txBody>
+                  <a:tcPr>
+                    <a:solidFill>
+                      <a:srgbClr val="0E1A2B"/>
+                    </a:solidFill>
+                  </a:tcPr>
+                </a:tc>
+                <a:tc>
+                  <a:txBody>
+                    <a:bodyPr/>
+                    <a:lstStyle/>
+                    <a:p>
+                      <a:r>
+                        <a:rPr sz="1000" b="1">
+                          <a:solidFill>
+                            <a:srgbClr val="FFFFFF"/>
+                          </a:solidFill>
+                        </a:rPr>
+                        <a:t>Contents</a:t>
+                      </a:r>
+                    </a:p>
+                  </a:txBody>
+                  <a:tcPr>
+                    <a:solidFill>
+                      <a:srgbClr val="0E1A2B"/>
+                    </a:solidFill>
+                  </a:tcPr>
+                </a:tc>
+              </a:tr>
+              <a:tr h="365760">
+                <a:tc>
+                  <a:txBody>
+                    <a:bodyPr/>
+                    <a:lstStyle/>
+                    <a:p>
+                      <a:r>
+                        <a:rPr sz="1000">
+                          <a:solidFill>
+                            <a:srgbClr val="0E1A2B"/>
+                          </a:solidFill>
+                        </a:rPr>
+                        <a:t>sql/01_schema.sql</a:t>
+                      </a:r>
+                    </a:p>
+                  </a:txBody>
+                  <a:tcPr>
+                    <a:solidFill>
+                      <a:srgbClr val="FFFFFF"/>
+                    </a:solidFill>
+                  </a:tcPr>
+                </a:tc>
+                <a:tc>
+                  <a:txBody>
+                    <a:bodyPr/>
+                    <a:lstStyle/>
+                    <a:p>
+                      <a:r>
+                        <a:rPr sz="1000">
+                          <a:solidFill>
+                            <a:srgbClr val="0E1A2B"/>
+                          </a:solidFill>
+                        </a:rPr>
+                        <a:t>DDL: 12 tables, constraints, triggers</a:t>
+                      </a:r>
+                    </a:p>
+                  </a:txBody>
+                  <a:tcPr>
+                    <a:solidFill>
+                      <a:srgbClr val="FFFFFF"/>
+                    </a:solidFill>
+                  </a:tcPr>
+                </a:tc>
+              </a:tr>
+              <a:tr h="365760">
+                <a:tc>
+                  <a:txBody>
+                    <a:bodyPr/>
+                    <a:lstStyle/>
+                    <a:p>
+                      <a:r>
+                        <a:rPr sz="1000">
+                          <a:solidFill>
+                            <a:srgbClr val="0E1A2B"/>
+                          </a:solidFill>
+                        </a:rPr>
+                        <a:t>sql/02_seed.sql</a:t>
+                      </a:r>
+                    </a:p>
+                  </a:txBody>
+                  <a:tcPr>
+                    <a:solidFill>
+                      <a:srgbClr val="EAF0F9"/>
+                    </a:solidFill>
+                  </a:tcPr>
+                </a:tc>
+                <a:tc>
+                  <a:txBody>
+                    <a:bodyPr/>
+                    <a:lstStyle/>
+                    <a:p>
+                      <a:r>
+                        <a:rPr sz="1000">
+                          <a:solidFill>
+                            <a:srgbClr val="0E1A2B"/>
+                          </a:solidFill>
+                        </a:rPr>
+                        <a:t>4 vendors, 6 products, 8 users, 6 purchases (₹3.18L), 8 allocations</a:t>
+                      </a:r>
+                    </a:p>
+                  </a:txBody>
+                  <a:tcPr>
+                    <a:solidFill>
+                      <a:srgbClr val="EAF0F9"/>
+                    </a:solidFill>
+                  </a:tcPr>
+                </a:tc>
+              </a:tr>
+              <a:tr h="365760">
+                <a:tc>
+                  <a:txBody>
+                    <a:bodyPr/>
+                    <a:lstStyle/>
+                    <a:p>
+                      <a:r>
+                        <a:rPr sz="1000">
+                          <a:solidFill>
+                            <a:srgbClr val="0E1A2B"/>
+                          </a:solidFill>
+                        </a:rPr>
+                        <a:t>sql/03_views_reports.sql</a:t>
+                      </a:r>
+                    </a:p>
+                  </a:txBody>
+                  <a:tcPr>
+                    <a:solidFill>
+                      <a:srgbClr val="FFFFFF"/>
+                    </a:solidFill>
+                  </a:tcPr>
+                </a:tc>
+                <a:tc>
+                  <a:txBody>
+                    <a:bodyPr/>
+                    <a:lstStyle/>
+                    <a:p>
+                      <a:r>
+                        <a:rPr sz="1000">
+                          <a:solidFill>
+                            <a:srgbClr val="0E1A2B"/>
+                          </a:solidFill>
+                        </a:rPr>
+                        <a:t>6 reporting views incl. effective-status expiry monitor</a:t>
+                      </a:r>
+                    </a:p>
+                  </a:txBody>
+                  <a:tcPr>
+                    <a:solidFill>
+                      <a:srgbClr val="FFFFFF"/>
+                    </a:solidFill>
+                  </a:tcPr>
+                </a:tc>
+              </a:tr>
+              <a:tr h="365760">
+                <a:tc>
+                  <a:txBody>
+                    <a:bodyPr/>
+                    <a:lstStyle/>
+                    <a:p>
+                      <a:r>
+                        <a:rPr sz="1000">
+                          <a:solidFill>
+                            <a:srgbClr val="0E1A2B"/>
+                          </a:solidFill>
+                        </a:rPr>
+                        <a:t>sql/04_procedures.sql</a:t>
+                      </a:r>
+                    </a:p>
+                  </a:txBody>
+                  <a:tcPr>
+                    <a:solidFill>
+                      <a:srgbClr val="EAF0F9"/>
+                    </a:solidFill>
+                  </a:tcPr>
+                </a:tc>
+                <a:tc>
+                  <a:txBody>
+                    <a:bodyPr/>
+                    <a:lstStyle/>
+                    <a:p>
+                      <a:r>
+                        <a:rPr sz="1000">
+                          <a:solidFill>
+                            <a:srgbClr val="0E1A2B"/>
+                          </a:solidFill>
+                        </a:rPr>
+                        <a:t>5 transactional stored procedures</a:t>
+                      </a:r>
+                    </a:p>
+                  </a:txBody>
+                  <a:tcPr>
+                    <a:solidFill>
+                      <a:srgbClr val="EAF0F9"/>
+                    </a:solidFill>
+                  </a:tcPr>
+                </a:tc>
+              </a:tr>
+              <a:tr h="365760">
+                <a:tc>
+                  <a:txBody>
+                    <a:bodyPr/>
+                    <a:lstStyle/>
+                    <a:p>
+                      <a:r>
+                        <a:rPr sz="1000">
+                          <a:solidFill>
+                            <a:srgbClr val="0E1A2B"/>
+                          </a:solidFill>
+                        </a:rPr>
+                        <a:t>sql/05_demo_queries.sql</a:t>
+                      </a:r>
+                    </a:p>
+                  </a:txBody>
+                  <a:tcPr>
+                    <a:solidFill>
+                      <a:srgbClr val="FFFFFF"/>
+                    </a:solidFill>
+                  </a:tcPr>
+                </a:tc>
+                <a:tc>
+                  <a:txBody>
+                    <a:bodyPr/>
+                    <a:lstStyle/>
+                    <a:p>
+                      <a:r>
+                        <a:rPr sz="1000">
+                          <a:solidFill>
+                            <a:srgbClr val="0E1A2B"/>
+                          </a:solidFill>
+                        </a:rPr>
+                        <a:t>12-step repeatable demonstration script</a:t>
+                      </a:r>
+                    </a:p>
+                  </a:txBody>
+                  <a:tcPr>
+                    <a:solidFill>
+                      <a:srgbClr val="FFFFFF"/>
+                    </a:solidFill>
+                  </a:tcPr>
+                </a:tc>
+              </a:tr>
+              <a:tr h="365760">
+                <a:tc>
+                  <a:txBody>
+                    <a:bodyPr/>
+                    <a:lstStyle/>
+                    <a:p>
+                      <a:r>
+                        <a:rPr sz="1000">
+                          <a:solidFill>
+                            <a:srgbClr val="0E1A2B"/>
+                          </a:solidFill>
+                        </a:rPr>
+                        <a:t>app.py + crud.py + db.py</a:t>
+                      </a:r>
+                    </a:p>
+                  </a:txBody>
+                  <a:tcPr>
+                    <a:solidFill>
+                      <a:srgbClr val="EAF0F9"/>
+                    </a:solidFill>
+                  </a:tcPr>
+                </a:tc>
+                <a:tc>
+                  <a:txBody>
+                    <a:bodyPr/>
+                    <a:lstStyle/>
+                    <a:p>
+                      <a:r>
+                        <a:rPr sz="1000">
+                          <a:solidFill>
+                            <a:srgbClr val="0E1A2B"/>
+                          </a:solidFill>
+                        </a:rPr>
+                        <a:t>Streamlit UI, CRUD diff-engine, dual-engine connection</a:t>
+                      </a:r>
+                    </a:p>
+                  </a:txBody>
+                  <a:tcPr>
+                    <a:solidFill>
+                      <a:srgbClr val="EAF0F9"/>
+                    </a:solidFill>
+                  </a:tcPr>
+                </a:tc>
+              </a:tr>
+              <a:tr h="365760">
+                <a:tc>
+                  <a:txBody>
+                    <a:bodyPr/>
+                    <a:lstStyle/>
+                    <a:p>
+                      <a:r>
+                        <a:rPr sz="1000">
+                          <a:solidFill>
+                            <a:srgbClr val="0E1A2B"/>
+                          </a:solidFill>
+                        </a:rPr>
+                        <a:t>data/app.db + scripts/</a:t>
+                      </a:r>
+                    </a:p>
+                  </a:txBody>
+                  <a:tcPr>
+                    <a:solidFill>
+                      <a:srgbClr val="FFFFFF"/>
+                    </a:solidFill>
+                  </a:tcPr>
+                </a:tc>
+                <a:tc>
+                  <a:txBody>
+                    <a:bodyPr/>
+                    <a:lstStyle/>
+                    <a:p>
+                      <a:r>
+                        <a:rPr sz="1000">
+                          <a:solidFill>
+                            <a:srgbClr val="0E1A2B"/>
+                          </a:solidFill>
+                        </a:rPr>
+                        <a:t>SQLite demo mirror (identical schema, views, triggers)</a:t>
+                      </a:r>
+                    </a:p>
+                  </a:txBody>
+                  <a:tcPr>
+                    <a:solidFill>
+                      <a:srgbClr val="FFFFFF"/>
+                    </a:solidFill>
+                  </a:tcPr>
+                </a:tc>
+              </a:tr>
+            </a:tbl>
+          </a:graphicData>
+        </a:graphic>
+      </p:graphicFrame>
+      <p:sp>
+        <p:nvSpPr>
+          <p:cNvPr id="9" name="TextBox 8"/>
+          <p:cNvSpPr txBox="1"/>
+          <p:nvPr/>
+        </p:nvSpPr>
+        <p:spPr>
+          <a:xfrm>
+            <a:off x="548640" y="6355080"/>
+            <a:ext cx="11064240" cy="365760"/>
+          </a:xfrm>
+          <a:prstGeom prst="rect">
+            <a:avLst/>
+          </a:prstGeom>
+          <a:noFill/>
+        </p:spPr>
+        <p:txBody>
+          <a:bodyPr wrap="none">
+            <a:spAutoFit/>
+          </a:bodyPr>
+          <a:lstStyle/>
+          <a:p>
+            <a:r>
+              <a:rPr sz="1000">
+                <a:solidFill>
+                  <a:srgbClr val="5A6473"/>
+                </a:solidFill>
+              </a:rPr>
+              <a:t>Full source of truth: every artifact is versionable plain text — schema, rules, data and UI</a:t>
+            </a:r>
+          </a:p>
+        </p:txBody>
+      </p:sp>
+    </p:spTree>
+  </p:cSld>
+  <p:clrMapOvr>
+    <a:masterClrMapping/>
+  </p:clrMapOvr>
+</p:sld>
+</file>
+
+<file path=ppt/slides/slide6.xml><?xml version="1.0" encoding="utf-8"?>
+<p:sld xmlns:a="http://schemas.openxmlformats.org/drawingml/2006/main" xmlns:p="http://schemas.openxmlformats.org/presentationml/2006/main" xmlns:r="http://schemas.openxmlformats.org/officeDocument/2006/relationships">
+  <p:cSld>
+    <p:spTree>
+      <p:nvGrpSpPr>
+        <p:cNvPr id="1" name=""/>
+        <p:cNvGrpSpPr/>
+        <p:nvPr/>
+      </p:nvGrpSpPr>
+      <p:grpSpPr/>
+      <p:sp>
+        <p:nvSpPr>
+          <p:cNvPr id="2" name="Rectangle 1"/>
+          <p:cNvSpPr/>
+          <p:nvPr/>
+        </p:nvSpPr>
+        <p:spPr>
+          <a:xfrm>
+            <a:off x="0" y="0"/>
+            <a:ext cx="12191695" cy="6858000"/>
+          </a:xfrm>
+          <a:prstGeom prst="rect">
+            <a:avLst/>
+          </a:prstGeom>
+          <a:solidFill>
+            <a:srgbClr val="F2F5FA"/>
+          </a:solidFill>
+          <a:ln>
+            <a:noFill/>
+          </a:ln>
+          <a:effectLst/>
+        </p:spPr>
+        <p:style>
+          <a:lnRef idx="1">
+            <a:schemeClr val="accent1"/>
+          </a:lnRef>
+          <a:fillRef idx="3">
+            <a:schemeClr val="accent1"/>
+          </a:fillRef>
+          <a:effectRef idx="2">
+            <a:schemeClr val="accent1"/>
+          </a:effectRef>
+          <a:fontRef idx="minor">
+            <a:schemeClr val="lt1"/>
+          </a:fontRef>
+        </p:style>
+        <p:txBody>
+          <a:bodyPr rtlCol="0" anchor="ctr"/>
+          <a:lstStyle/>
+          <a:p>
+            <a:pPr algn="ctr"/>
+          </a:p>
+        </p:txBody>
+      </p:sp>
+      <p:sp>
+        <p:nvSpPr>
+          <p:cNvPr id="3" name="Rectangle 2"/>
+          <p:cNvSpPr/>
+          <p:nvPr/>
+        </p:nvSpPr>
+        <p:spPr>
+          <a:xfrm>
+            <a:off x="0" y="0"/>
+            <a:ext cx="12191695" cy="1051560"/>
+          </a:xfrm>
+          <a:prstGeom prst="rect">
+            <a:avLst/>
+          </a:prstGeom>
+          <a:solidFill>
+            <a:srgbClr val="0E1A2B"/>
+          </a:solidFill>
+          <a:ln>
+            <a:noFill/>
+          </a:ln>
+          <a:effectLst/>
+        </p:spPr>
+        <p:style>
+          <a:lnRef idx="1">
+            <a:schemeClr val="accent1"/>
+          </a:lnRef>
+          <a:fillRef idx="3">
+            <a:schemeClr val="accent1"/>
+          </a:fillRef>
+          <a:effectRef idx="2">
+            <a:schemeClr val="accent1"/>
+          </a:effectRef>
+          <a:fontRef idx="minor">
+            <a:schemeClr val="lt1"/>
+          </a:fontRef>
+        </p:style>
+        <p:txBody>
+          <a:bodyPr rtlCol="0" anchor="ctr" wrap="square" lIns="502920" tIns="109728"/>
+          <a:lstStyle/>
+          <a:p>
+            <a:pPr algn="ctr"/>
+            <a:r>
+              <a:rPr sz="1200" b="1">
+                <a:solidFill>
+                  <a:srgbClr val="35C4D5"/>
+                </a:solidFill>
+              </a:rPr>
+              <a:t>IMPLEMENTATION</a:t>
+            </a:r>
+          </a:p>
+          <a:p>
+            <a:r>
+              <a:rPr sz="2600" b="1">
+                <a:solidFill>
+                  <a:srgbClr val="FFFFFF"/>
+                </a:solidFill>
+              </a:rPr>
+              <a:t>Implementation — Module Breakdown</a:t>
             </a:r>
           </a:p>
         </p:txBody>
@@ -5321,10 +8606,9 @@
                 <a:tableStyleId>{5C22544A-7EE6-4342-B048-85BDC9FD1C3A}</a:tableStyleId>
               </a:tblPr>
               <a:tblGrid>
-                <a:gridCol w="2799386"/>
-                <a:gridCol w="3065994"/>
-                <a:gridCol w="4399035"/>
-                <a:gridCol w="799824"/>
+                <a:gridCol w="1763864"/>
+                <a:gridCol w="3848431"/>
+                <a:gridCol w="5451944"/>
               </a:tblGrid>
               <a:tr h="365760">
                 <a:tc>
@@ -5333,12 +8617,12 @@
                     <a:lstStyle/>
                     <a:p>
                       <a:r>
-                        <a:rPr sz="1150" b="1">
+                        <a:rPr sz="1200" b="1">
                           <a:solidFill>
                             <a:srgbClr val="FFFFFF"/>
                           </a:solidFill>
                         </a:rPr>
-                        <a:t>Scenario</a:t>
+                        <a:t>Module</a:t>
                       </a:r>
                     </a:p>
                   </a:txBody>
@@ -5354,12 +8638,12 @@
                     <a:lstStyle/>
                     <a:p>
                       <a:r>
-                        <a:rPr sz="1150" b="1">
+                        <a:rPr sz="1200" b="1">
                           <a:solidFill>
                             <a:srgbClr val="FFFFFF"/>
                           </a:solidFill>
                         </a:rPr>
-                        <a:t>Attempted Operation</a:t>
+                        <a:t>Tables</a:t>
                       </a:r>
                     </a:p>
                   </a:txBody>
@@ -5375,33 +8659,12 @@
                     <a:lstStyle/>
                     <a:p>
                       <a:r>
-                        <a:rPr sz="1150" b="1">
+                        <a:rPr sz="1200" b="1">
                           <a:solidFill>
                             <a:srgbClr val="FFFFFF"/>
                           </a:solidFill>
                         </a:rPr>
-                        <a:t>Observed Behaviour</a:t>
-                      </a:r>
-                    </a:p>
-                  </a:txBody>
-                  <a:tcPr>
-                    <a:solidFill>
-                      <a:srgbClr val="0E1A2B"/>
-                    </a:solidFill>
-                  </a:tcPr>
-                </a:tc>
-                <a:tc>
-                  <a:txBody>
-                    <a:bodyPr/>
-                    <a:lstStyle/>
-                    <a:p>
-                      <a:r>
-                        <a:rPr sz="1150" b="1">
-                          <a:solidFill>
-                            <a:srgbClr val="FFFFFF"/>
-                          </a:solidFill>
-                        </a:rPr>
-                        <a:t>Result</a:t>
+                        <a:t>Delivered Behaviour</a:t>
                       </a:r>
                     </a:p>
                   </a:txBody>
@@ -5419,12 +8682,12 @@
                     <a:lstStyle/>
                     <a:p>
                       <a:r>
-                        <a:rPr sz="1150">
+                        <a:rPr sz="1200">
                           <a:solidFill>
                             <a:srgbClr val="0E1A2B"/>
                           </a:solidFill>
                         </a:rPr>
-                        <a:t>Over-allocate beyond purchased seats</a:t>
+                        <a:t>Procurement</a:t>
                       </a:r>
                     </a:p>
                   </a:txBody>
@@ -5440,12 +8703,12 @@
                     <a:lstStyle/>
                     <a:p>
                       <a:r>
-                        <a:rPr sz="1150">
+                        <a:rPr sz="1200">
                           <a:solidFill>
                             <a:srgbClr val="0E1A2B"/>
                           </a:solidFill>
                         </a:rPr>
-                        <a:t>INSERT into ALLOCATION at seat limit</a:t>
+                        <a:t>VENDOR · SOFTWARE_PRODUCT · PURCHASE · RENEWAL</a:t>
                       </a:r>
                     </a:p>
                   </a:txBody>
@@ -5461,33 +8724,12 @@
                     <a:lstStyle/>
                     <a:p>
                       <a:r>
-                        <a:rPr sz="1150">
+                        <a:rPr sz="1200">
                           <a:solidFill>
                             <a:srgbClr val="0E1A2B"/>
                           </a:solidFill>
                         </a:rPr>
-                        <a:t>Aborted — 'BR-03 violated: all purchased seats allocated'</a:t>
-                      </a:r>
-                    </a:p>
-                  </a:txBody>
-                  <a:tcPr>
-                    <a:solidFill>
-                      <a:srgbClr val="FFFFFF"/>
-                    </a:solidFill>
-                  </a:tcPr>
-                </a:tc>
-                <a:tc>
-                  <a:txBody>
-                    <a:bodyPr/>
-                    <a:lstStyle/>
-                    <a:p>
-                      <a:r>
-                        <a:rPr sz="1150">
-                          <a:solidFill>
-                            <a:srgbClr val="0E1A2B"/>
-                          </a:solidFill>
-                        </a:rPr>
-                        <a:t>PASS</a:t>
+                        <a:t>CRUD forms + renewal workflow extends license validity atomically</a:t>
                       </a:r>
                     </a:p>
                   </a:txBody>
@@ -5505,12 +8747,12 @@
                     <a:lstStyle/>
                     <a:p>
                       <a:r>
-                        <a:rPr sz="1150">
+                        <a:rPr sz="1200">
                           <a:solidFill>
                             <a:srgbClr val="0E1A2B"/>
                           </a:solidFill>
                         </a:rPr>
-                        <a:t>Allocate on non-ACTIVE license</a:t>
+                        <a:t>Licensing</a:t>
                       </a:r>
                     </a:p>
                   </a:txBody>
@@ -5526,12 +8768,12 @@
                     <a:lstStyle/>
                     <a:p>
                       <a:r>
-                        <a:rPr sz="1150">
+                        <a:rPr sz="1200">
                           <a:solidFill>
                             <a:srgbClr val="0E1A2B"/>
                           </a:solidFill>
                         </a:rPr>
-                        <a:t>INSERT against expired/revoked license</a:t>
+                        <a:t>LICENSE · LICENSE_TYPE · SUBSCRIPTION</a:t>
                       </a:r>
                     </a:p>
                   </a:txBody>
@@ -5547,33 +8789,12 @@
                     <a:lstStyle/>
                     <a:p>
                       <a:r>
-                        <a:rPr sz="1150">
+                        <a:rPr sz="1200">
                           <a:solidFill>
                             <a:srgbClr val="0E1A2B"/>
                           </a:solidFill>
                         </a:rPr>
-                        <a:t>Aborted by trigger BR-01</a:t>
-                      </a:r>
-                    </a:p>
-                  </a:txBody>
-                  <a:tcPr>
-                    <a:solidFill>
-                      <a:srgbClr val="EAF0F9"/>
-                    </a:solidFill>
-                  </a:tcPr>
-                </a:tc>
-                <a:tc>
-                  <a:txBody>
-                    <a:bodyPr/>
-                    <a:lstStyle/>
-                    <a:p>
-                      <a:r>
-                        <a:rPr sz="1150">
-                          <a:solidFill>
-                            <a:srgbClr val="0E1A2B"/>
-                          </a:solidFill>
-                        </a:rPr>
-                        <a:t>PASS</a:t>
+                        <a:t>Unique license keys, seat counts, validity windows, billing cycles</a:t>
                       </a:r>
                     </a:p>
                   </a:txBody>
@@ -5591,12 +8812,12 @@
                     <a:lstStyle/>
                     <a:p>
                       <a:r>
-                        <a:rPr sz="1150">
+                        <a:rPr sz="1200">
                           <a:solidFill>
                             <a:srgbClr val="0E1A2B"/>
                           </a:solidFill>
                         </a:rPr>
-                        <a:t>Return date before allocation date</a:t>
+                        <a:t>Organization</a:t>
                       </a:r>
                     </a:p>
                   </a:txBody>
@@ -5612,12 +8833,12 @@
                     <a:lstStyle/>
                     <a:p>
                       <a:r>
-                        <a:rPr sz="1150">
+                        <a:rPr sz="1200">
                           <a:solidFill>
                             <a:srgbClr val="0E1A2B"/>
                           </a:solidFill>
                         </a:rPr>
-                        <a:t>UPDATE ALLOCATION with earlier return</a:t>
+                        <a:t>DEPARTMENT · APP_USER · DEVICE</a:t>
                       </a:r>
                     </a:p>
                   </a:txBody>
@@ -5633,33 +8854,12 @@
                     <a:lstStyle/>
                     <a:p>
                       <a:r>
-                        <a:rPr sz="1150">
+                        <a:rPr sz="1200">
                           <a:solidFill>
                             <a:srgbClr val="0E1A2B"/>
                           </a:solidFill>
                         </a:rPr>
-                        <a:t>Aborted by BR-04 CHECK + trigger</a:t>
-                      </a:r>
-                    </a:p>
-                  </a:txBody>
-                  <a:tcPr>
-                    <a:solidFill>
-                      <a:srgbClr val="FFFFFF"/>
-                    </a:solidFill>
-                  </a:tcPr>
-                </a:tc>
-                <a:tc>
-                  <a:txBody>
-                    <a:bodyPr/>
-                    <a:lstStyle/>
-                    <a:p>
-                      <a:r>
-                        <a:rPr sz="1150">
-                          <a:solidFill>
-                            <a:srgbClr val="0E1A2B"/>
-                          </a:solidFill>
-                        </a:rPr>
-                        <a:t>PASS</a:t>
+                        <a:t>Roles (IT Admin, Manager, Procurement, Compliance, Employee)</a:t>
                       </a:r>
                     </a:p>
                   </a:txBody>
@@ -5677,12 +8877,12 @@
                     <a:lstStyle/>
                     <a:p>
                       <a:r>
-                        <a:rPr sz="1150">
+                        <a:rPr sz="1200">
                           <a:solidFill>
                             <a:srgbClr val="0E1A2B"/>
                           </a:solidFill>
                         </a:rPr>
-                        <a:t>Duplicate license key / invoice</a:t>
+                        <a:t>Compliance</a:t>
                       </a:r>
                     </a:p>
                   </a:txBody>
@@ -5698,12 +8898,12 @@
                     <a:lstStyle/>
                     <a:p>
                       <a:r>
-                        <a:rPr sz="1150">
+                        <a:rPr sz="1200">
                           <a:solidFill>
                             <a:srgbClr val="0E1A2B"/>
                           </a:solidFill>
                         </a:rPr>
-                        <a:t>INSERT duplicate key</a:t>
+                        <a:t>ALLOCATION · COMPLIANCE_CHECK</a:t>
                       </a:r>
                     </a:p>
                   </a:txBody>
@@ -5719,33 +8919,12 @@
                     <a:lstStyle/>
                     <a:p>
                       <a:r>
-                        <a:rPr sz="1150">
+                        <a:rPr sz="1200">
                           <a:solidFill>
                             <a:srgbClr val="0E1A2B"/>
                           </a:solidFill>
                         </a:rPr>
-                        <a:t>Rejected by UNIQUE constraint</a:t>
-                      </a:r>
-                    </a:p>
-                  </a:txBody>
-                  <a:tcPr>
-                    <a:solidFill>
-                      <a:srgbClr val="EAF0F9"/>
-                    </a:solidFill>
-                  </a:tcPr>
-                </a:tc>
-                <a:tc>
-                  <a:txBody>
-                    <a:bodyPr/>
-                    <a:lstStyle/>
-                    <a:p>
-                      <a:r>
-                        <a:rPr sz="1150">
-                          <a:solidFill>
-                            <a:srgbClr val="0E1A2B"/>
-                          </a:solidFill>
-                        </a:rPr>
-                        <a:t>PASS</a:t>
+                        <a:t>Triggers BR-01…BR-04 + dated audit trail per allocation</a:t>
                       </a:r>
                     </a:p>
                   </a:txBody>
@@ -5763,12 +8942,12 @@
                     <a:lstStyle/>
                     <a:p>
                       <a:r>
-                        <a:rPr sz="1150">
+                        <a:rPr sz="1200">
                           <a:solidFill>
                             <a:srgbClr val="0E1A2B"/>
                           </a:solidFill>
                         </a:rPr>
-                        <a:t>Reclaim non-active allocation</a:t>
+                        <a:t>Reporting</a:t>
                       </a:r>
                     </a:p>
                   </a:txBody>
@@ -5784,12 +8963,12 @@
                     <a:lstStyle/>
                     <a:p>
                       <a:r>
-                        <a:rPr sz="1150">
+                        <a:rPr sz="1200">
                           <a:solidFill>
                             <a:srgbClr val="0E1A2B"/>
                           </a:solidFill>
                         </a:rPr>
-                        <a:t>CALL sp_reclaim_license on RECLAIMED row</a:t>
+                        <a:t>6 SQL views</a:t>
                       </a:r>
                     </a:p>
                   </a:txBody>
@@ -5805,33 +8984,12 @@
                     <a:lstStyle/>
                     <a:p>
                       <a:r>
-                        <a:rPr sz="1150">
+                        <a:rPr sz="1200">
                           <a:solidFill>
                             <a:srgbClr val="0E1A2B"/>
                           </a:solidFill>
                         </a:rPr>
-                        <a:t>Aborted — 'Allocation not found or not ACTIVE'</a:t>
-                      </a:r>
-                    </a:p>
-                  </a:txBody>
-                  <a:tcPr>
-                    <a:solidFill>
-                      <a:srgbClr val="FFFFFF"/>
-                    </a:solidFill>
-                  </a:tcPr>
-                </a:tc>
-                <a:tc>
-                  <a:txBody>
-                    <a:bodyPr/>
-                    <a:lstStyle/>
-                    <a:p>
-                      <a:r>
-                        <a:rPr sz="1150">
-                          <a:solidFill>
-                            <a:srgbClr val="0E1A2B"/>
-                          </a:solidFill>
-                        </a:rPr>
-                        <a:t>PASS</a:t>
+                        <a:t>Live-computed KPIs: utilization %, expiry bands, lifetime spend</a:t>
                       </a:r>
                     </a:p>
                   </a:txBody>
@@ -5854,401 +9012,8 @@
         </p:nvSpPr>
         <p:spPr>
           <a:xfrm>
-            <a:off x="548640" y="6355080"/>
-            <a:ext cx="11064240" cy="365760"/>
-          </a:xfrm>
-          <a:prstGeom prst="rect">
-            <a:avLst/>
-          </a:prstGeom>
-          <a:noFill/>
-        </p:spPr>
-        <p:txBody>
-          <a:bodyPr wrap="none">
-            <a:spAutoFit/>
-          </a:bodyPr>
-          <a:lstStyle/>
-          <a:p>
-            <a:r>
-              <a:rPr sz="1000">
-                <a:solidFill>
-                  <a:srgbClr val="5A6473"/>
-                </a:solidFill>
-              </a:rPr>
-              <a:t>Integrity holds even when rules are deliberately violated — database-level enforcement proven</a:t>
-            </a:r>
-          </a:p>
-        </p:txBody>
-      </p:sp>
-    </p:spTree>
-  </p:cSld>
-  <p:clrMapOvr>
-    <a:masterClrMapping/>
-  </p:clrMapOvr>
-</p:sld>
-</file>
-
-<file path=ppt/slides/slide6.xml><?xml version="1.0" encoding="utf-8"?>
-<p:sld xmlns:a="http://schemas.openxmlformats.org/drawingml/2006/main" xmlns:p="http://schemas.openxmlformats.org/presentationml/2006/main" xmlns:r="http://schemas.openxmlformats.org/officeDocument/2006/relationships">
-  <p:cSld>
-    <p:spTree>
-      <p:nvGrpSpPr>
-        <p:cNvPr id="1" name=""/>
-        <p:cNvGrpSpPr/>
-        <p:nvPr/>
-      </p:nvGrpSpPr>
-      <p:grpSpPr/>
-      <p:sp>
-        <p:nvSpPr>
-          <p:cNvPr id="2" name="Rectangle 1"/>
-          <p:cNvSpPr/>
-          <p:nvPr/>
-        </p:nvSpPr>
-        <p:spPr>
-          <a:xfrm>
-            <a:off x="0" y="0"/>
-            <a:ext cx="12191695" cy="6858000"/>
-          </a:xfrm>
-          <a:prstGeom prst="rect">
-            <a:avLst/>
-          </a:prstGeom>
-          <a:solidFill>
-            <a:srgbClr val="F2F5FA"/>
-          </a:solidFill>
-          <a:ln>
-            <a:noFill/>
-          </a:ln>
-          <a:effectLst/>
-        </p:spPr>
-        <p:style>
-          <a:lnRef idx="1">
-            <a:schemeClr val="accent1"/>
-          </a:lnRef>
-          <a:fillRef idx="3">
-            <a:schemeClr val="accent1"/>
-          </a:fillRef>
-          <a:effectRef idx="2">
-            <a:schemeClr val="accent1"/>
-          </a:effectRef>
-          <a:fontRef idx="minor">
-            <a:schemeClr val="lt1"/>
-          </a:fontRef>
-        </p:style>
-        <p:txBody>
-          <a:bodyPr rtlCol="0" anchor="ctr"/>
-          <a:lstStyle/>
-          <a:p>
-            <a:pPr algn="ctr"/>
-          </a:p>
-        </p:txBody>
-      </p:sp>
-      <p:sp>
-        <p:nvSpPr>
-          <p:cNvPr id="3" name="Rectangle 2"/>
-          <p:cNvSpPr/>
-          <p:nvPr/>
-        </p:nvSpPr>
-        <p:spPr>
-          <a:xfrm>
-            <a:off x="0" y="0"/>
-            <a:ext cx="12191695" cy="1051560"/>
-          </a:xfrm>
-          <a:prstGeom prst="rect">
-            <a:avLst/>
-          </a:prstGeom>
-          <a:solidFill>
-            <a:srgbClr val="0E1A2B"/>
-          </a:solidFill>
-          <a:ln>
-            <a:noFill/>
-          </a:ln>
-          <a:effectLst/>
-        </p:spPr>
-        <p:style>
-          <a:lnRef idx="1">
-            <a:schemeClr val="accent1"/>
-          </a:lnRef>
-          <a:fillRef idx="3">
-            <a:schemeClr val="accent1"/>
-          </a:fillRef>
-          <a:effectRef idx="2">
-            <a:schemeClr val="accent1"/>
-          </a:effectRef>
-          <a:fontRef idx="minor">
-            <a:schemeClr val="lt1"/>
-          </a:fontRef>
-        </p:style>
-        <p:txBody>
-          <a:bodyPr rtlCol="0" anchor="ctr" wrap="square" lIns="502920" tIns="109728"/>
-          <a:lstStyle/>
-          <a:p>
-            <a:pPr algn="ctr"/>
-            <a:r>
-              <a:rPr sz="1200" b="1">
-                <a:solidFill>
-                  <a:srgbClr val="35C4D5"/>
-                </a:solidFill>
-              </a:rPr>
-              <a:t>DOCUMENTATION</a:t>
-            </a:r>
-          </a:p>
-          <a:p>
-            <a:r>
-              <a:rPr sz="2600" b="1">
-                <a:solidFill>
-                  <a:srgbClr val="FFFFFF"/>
-                </a:solidFill>
-              </a:rPr>
-              <a:t>Documentation — Final Deliverables</a:t>
-            </a:r>
-          </a:p>
-        </p:txBody>
-      </p:sp>
-      <p:sp>
-        <p:nvSpPr>
-          <p:cNvPr id="4" name="Rectangle 3"/>
-          <p:cNvSpPr/>
-          <p:nvPr/>
-        </p:nvSpPr>
-        <p:spPr>
-          <a:xfrm>
-            <a:off x="0" y="1051560"/>
-            <a:ext cx="12191695" cy="50800"/>
-          </a:xfrm>
-          <a:prstGeom prst="rect">
-            <a:avLst/>
-          </a:prstGeom>
-          <a:solidFill>
-            <a:srgbClr val="35C4D5"/>
-          </a:solidFill>
-          <a:ln>
-            <a:noFill/>
-          </a:ln>
-          <a:effectLst/>
-        </p:spPr>
-        <p:style>
-          <a:lnRef idx="1">
-            <a:schemeClr val="accent1"/>
-          </a:lnRef>
-          <a:fillRef idx="3">
-            <a:schemeClr val="accent1"/>
-          </a:fillRef>
-          <a:effectRef idx="2">
-            <a:schemeClr val="accent1"/>
-          </a:effectRef>
-          <a:fontRef idx="minor">
-            <a:schemeClr val="lt1"/>
-          </a:fontRef>
-        </p:style>
-        <p:txBody>
-          <a:bodyPr rtlCol="0" anchor="ctr"/>
-          <a:lstStyle/>
-          <a:p>
-            <a:pPr algn="ctr"/>
-          </a:p>
-        </p:txBody>
-      </p:sp>
-      <p:sp>
-        <p:nvSpPr>
-          <p:cNvPr id="5" name="Rectangle 4"/>
-          <p:cNvSpPr/>
-          <p:nvPr/>
-        </p:nvSpPr>
-        <p:spPr>
-          <a:xfrm>
-            <a:off x="548640" y="1645920"/>
-            <a:ext cx="3544824" cy="2468880"/>
-          </a:xfrm>
-          <a:prstGeom prst="rect">
-            <a:avLst/>
-          </a:prstGeom>
-          <a:solidFill>
-            <a:srgbClr val="FFFFFF"/>
-          </a:solidFill>
-          <a:ln>
-            <a:solidFill>
-              <a:srgbClr val="DDE4EE"/>
-            </a:solidFill>
-          </a:ln>
-          <a:effectLst/>
-        </p:spPr>
-        <p:style>
-          <a:lnRef idx="1">
-            <a:schemeClr val="accent1"/>
-          </a:lnRef>
-          <a:fillRef idx="3">
-            <a:schemeClr val="accent1"/>
-          </a:fillRef>
-          <a:effectRef idx="2">
-            <a:schemeClr val="accent1"/>
-          </a:effectRef>
-          <a:fontRef idx="minor">
-            <a:schemeClr val="lt1"/>
-          </a:fontRef>
-        </p:style>
-        <p:txBody>
-          <a:bodyPr rtlCol="0" anchor="ctr" wrap="square" lIns="137160" tIns="109728"/>
-          <a:lstStyle/>
-          <a:p>
-            <a:pPr algn="ctr"/>
-            <a:r>
-              <a:rPr sz="1500" b="1">
-                <a:solidFill>
-                  <a:srgbClr val="1F6FEB"/>
-                </a:solidFill>
-              </a:rPr>
-              <a:t>sql/01_schema.sql</a:t>
-            </a:r>
-          </a:p>
-          <a:p>
-            <a:r>
-              <a:rPr sz="1150">
-                <a:solidFill>
-                  <a:srgbClr val="5A6473"/>
-                </a:solidFill>
-              </a:rPr>
-              <a:t>Complete 3NF DDL: 12 tables, PK/FK graph, CHECK &amp; UNIQUE constraints, 4 triggers, business rules BR-01…BR-04.</a:t>
-            </a:r>
-          </a:p>
-        </p:txBody>
-      </p:sp>
-      <p:sp>
-        <p:nvSpPr>
-          <p:cNvPr id="6" name="Rectangle 5"/>
-          <p:cNvSpPr/>
-          <p:nvPr/>
-        </p:nvSpPr>
-        <p:spPr>
-          <a:xfrm>
-            <a:off x="4322064" y="1645920"/>
-            <a:ext cx="3544824" cy="2468880"/>
-          </a:xfrm>
-          <a:prstGeom prst="rect">
-            <a:avLst/>
-          </a:prstGeom>
-          <a:solidFill>
-            <a:srgbClr val="FFFFFF"/>
-          </a:solidFill>
-          <a:ln>
-            <a:solidFill>
-              <a:srgbClr val="DDE4EE"/>
-            </a:solidFill>
-          </a:ln>
-          <a:effectLst/>
-        </p:spPr>
-        <p:style>
-          <a:lnRef idx="1">
-            <a:schemeClr val="accent1"/>
-          </a:lnRef>
-          <a:fillRef idx="3">
-            <a:schemeClr val="accent1"/>
-          </a:fillRef>
-          <a:effectRef idx="2">
-            <a:schemeClr val="accent1"/>
-          </a:effectRef>
-          <a:fontRef idx="minor">
-            <a:schemeClr val="lt1"/>
-          </a:fontRef>
-        </p:style>
-        <p:txBody>
-          <a:bodyPr rtlCol="0" anchor="ctr" wrap="square" lIns="137160" tIns="109728"/>
-          <a:lstStyle/>
-          <a:p>
-            <a:pPr algn="ctr"/>
-            <a:r>
-              <a:rPr sz="1500" b="1">
-                <a:solidFill>
-                  <a:srgbClr val="35C4D5"/>
-                </a:solidFill>
-              </a:rPr>
-              <a:t>sql/02–05 scripts</a:t>
-            </a:r>
-          </a:p>
-          <a:p>
-            <a:r>
-              <a:rPr sz="1150">
-                <a:solidFill>
-                  <a:srgbClr val="5A6473"/>
-                </a:solidFill>
-              </a:rPr>
-              <a:t>Seed dataset, 6 reporting views, 4 stored procedures and a 12-step demonstration script with README build instructions.</a:t>
-            </a:r>
-          </a:p>
-        </p:txBody>
-      </p:sp>
-      <p:sp>
-        <p:nvSpPr>
-          <p:cNvPr id="7" name="Rectangle 6"/>
-          <p:cNvSpPr/>
-          <p:nvPr/>
-        </p:nvSpPr>
-        <p:spPr>
-          <a:xfrm>
-            <a:off x="8095488" y="1645920"/>
-            <a:ext cx="3544824" cy="2468880"/>
-          </a:xfrm>
-          <a:prstGeom prst="rect">
-            <a:avLst/>
-          </a:prstGeom>
-          <a:solidFill>
-            <a:srgbClr val="FFFFFF"/>
-          </a:solidFill>
-          <a:ln>
-            <a:solidFill>
-              <a:srgbClr val="DDE4EE"/>
-            </a:solidFill>
-          </a:ln>
-          <a:effectLst/>
-        </p:spPr>
-        <p:style>
-          <a:lnRef idx="1">
-            <a:schemeClr val="accent1"/>
-          </a:lnRef>
-          <a:fillRef idx="3">
-            <a:schemeClr val="accent1"/>
-          </a:fillRef>
-          <a:effectRef idx="2">
-            <a:schemeClr val="accent1"/>
-          </a:effectRef>
-          <a:fontRef idx="minor">
-            <a:schemeClr val="lt1"/>
-          </a:fontRef>
-        </p:style>
-        <p:txBody>
-          <a:bodyPr rtlCol="0" anchor="ctr" wrap="square" lIns="137160" tIns="109728"/>
-          <a:lstStyle/>
-          <a:p>
-            <a:pPr algn="ctr"/>
-            <a:r>
-              <a:rPr sz="1500" b="1">
-                <a:solidFill>
-                  <a:srgbClr val="1EA97A"/>
-                </a:solidFill>
-              </a:rPr>
-              <a:t>Review decks 1–3</a:t>
-            </a:r>
-          </a:p>
-          <a:p>
-            <a:r>
-              <a:rPr sz="1150">
-                <a:solidFill>
-                  <a:srgbClr val="5A6473"/>
-                </a:solidFill>
-              </a:rPr>
-              <a:t>Requirement analysis → design &amp; implementation → final demonstration; full project narrative for evaluation.</a:t>
-            </a:r>
-          </a:p>
-        </p:txBody>
-      </p:sp>
-      <p:sp>
-        <p:nvSpPr>
-          <p:cNvPr id="8" name="TextBox 7"/>
-          <p:cNvSpPr txBox="1"/>
-          <p:nvPr/>
-        </p:nvSpPr>
-        <p:spPr>
-          <a:xfrm>
-            <a:off x="548640" y="4480560"/>
-            <a:ext cx="11064240" cy="5120640"/>
+            <a:off x="548640" y="4572000"/>
+            <a:ext cx="11064240" cy="320039"/>
           </a:xfrm>
           <a:prstGeom prst="rect">
             <a:avLst/>
@@ -6267,12 +9032,12 @@
               </a:spcAft>
             </a:pPr>
             <a:r>
-              <a:rPr sz="1400">
+              <a:rPr sz="1300">
                 <a:solidFill>
                   <a:srgbClr val="0E1A2B"/>
                 </a:solidFill>
               </a:rPr>
-              <a:t>• README.md documents build order, requirements (MySQL 8), enforced business rules and verification results</a:t>
+              <a:t>• Every business rule enforced at the DATABASE level (triggers/constraints) — no application bypass possible</a:t>
             </a:r>
           </a:p>
           <a:p>
@@ -6282,12 +9047,45 @@
               </a:spcAft>
             </a:pPr>
             <a:r>
-              <a:rPr sz="1400">
+              <a:rPr sz="1300">
                 <a:solidFill>
                   <a:srgbClr val="0E1A2B"/>
                 </a:solidFill>
               </a:rPr>
-              <a:t>• Verification evidence: schema + seed + views executed end-to-end; negative tests recorded with observed errors</a:t>
+              <a:t>• Workflows run as transactions: allocate/reclaim/renew either fully commit or fully roll back (ACID)</a:t>
+            </a:r>
+          </a:p>
+        </p:txBody>
+      </p:sp>
+      <p:sp>
+        <p:nvSpPr>
+          <p:cNvPr id="7" name="TextBox 6"/>
+          <p:cNvSpPr txBox="1"/>
+          <p:nvPr/>
+        </p:nvSpPr>
+        <p:spPr>
+          <a:xfrm>
+            <a:off x="548640" y="6355080"/>
+            <a:ext cx="11064240" cy="365760"/>
+          </a:xfrm>
+          <a:prstGeom prst="rect">
+            <a:avLst/>
+          </a:prstGeom>
+          <a:noFill/>
+        </p:spPr>
+        <p:txBody>
+          <a:bodyPr wrap="none">
+            <a:spAutoFit/>
+          </a:bodyPr>
+          <a:lstStyle/>
+          <a:p>
+            <a:r>
+              <a:rPr sz="1000">
+                <a:solidFill>
+                  <a:srgbClr val="5A6473"/>
+                </a:solidFill>
+              </a:rPr>
+              <a:t>Modules map 1:1 to the Review 1 conceptual design — traceability from ER model to shipped artifacts</a:t>
             </a:r>
           </a:p>
         </p:txBody>
@@ -6401,7 +9199,7 @@
                   <a:srgbClr val="35C4D5"/>
                 </a:solidFill>
               </a:rPr>
-              <a:t>DOCUMENTATION</a:t>
+              <a:t>APPLICATION FEATURES</a:t>
             </a:r>
           </a:p>
           <a:p>
@@ -6411,7 +9209,7 @@
                   <a:srgbClr val="FFFFFF"/>
                 </a:solidFill>
               </a:rPr>
-              <a:t>Testing Summary &amp; Reliability</a:t>
+              <a:t>Application Features — Web UI (Streamlit)</a:t>
             </a:r>
           </a:p>
         </p:txBody>
@@ -6460,517 +9258,386 @@
           </a:p>
         </p:txBody>
       </p:sp>
-      <p:graphicFrame>
-        <p:nvGraphicFramePr>
-          <p:cNvPr id="5" name="Table 4"/>
-          <p:cNvGraphicFramePr>
-            <a:graphicFrameLocks noGrp="1"/>
-          </p:cNvGraphicFramePr>
+      <p:sp>
+        <p:nvSpPr>
+          <p:cNvPr id="5" name="Rectangle 4"/>
+          <p:cNvSpPr/>
           <p:nvPr/>
-        </p:nvGraphicFramePr>
-        <p:xfrm>
-          <a:off x="548640" y="1645920"/>
-          <a:ext cx="11064239" cy="2560320"/>
-        </p:xfrm>
-        <a:graphic>
-          <a:graphicData uri="http://schemas.openxmlformats.org/drawingml/2006/table">
-            <a:tbl>
-              <a:tblPr firstRow="1" bandRow="1">
-                <a:tableStyleId>{5C22544A-7EE6-4342-B048-85BDC9FD1C3A}</a:tableStyleId>
-              </a:tblPr>
-              <a:tblGrid>
-                <a:gridCol w="2928769"/>
-                <a:gridCol w="6833795"/>
-                <a:gridCol w="1301675"/>
-              </a:tblGrid>
-              <a:tr h="365760">
-                <a:tc>
-                  <a:txBody>
-                    <a:bodyPr/>
-                    <a:lstStyle/>
-                    <a:p>
-                      <a:r>
-                        <a:rPr sz="1250" b="1">
-                          <a:solidFill>
-                            <a:srgbClr val="FFFFFF"/>
-                          </a:solidFill>
-                        </a:rPr>
-                        <a:t>Test Area</a:t>
-                      </a:r>
-                    </a:p>
-                  </a:txBody>
-                  <a:tcPr>
-                    <a:solidFill>
-                      <a:srgbClr val="0E1A2B"/>
-                    </a:solidFill>
-                  </a:tcPr>
-                </a:tc>
-                <a:tc>
-                  <a:txBody>
-                    <a:bodyPr/>
-                    <a:lstStyle/>
-                    <a:p>
-                      <a:r>
-                        <a:rPr sz="1250" b="1">
-                          <a:solidFill>
-                            <a:srgbClr val="FFFFFF"/>
-                          </a:solidFill>
-                        </a:rPr>
-                        <a:t>Coverage</a:t>
-                      </a:r>
-                    </a:p>
-                  </a:txBody>
-                  <a:tcPr>
-                    <a:solidFill>
-                      <a:srgbClr val="0E1A2B"/>
-                    </a:solidFill>
-                  </a:tcPr>
-                </a:tc>
-                <a:tc>
-                  <a:txBody>
-                    <a:bodyPr/>
-                    <a:lstStyle/>
-                    <a:p>
-                      <a:r>
-                        <a:rPr sz="1250" b="1">
-                          <a:solidFill>
-                            <a:srgbClr val="FFFFFF"/>
-                          </a:solidFill>
-                        </a:rPr>
-                        <a:t>Status</a:t>
-                      </a:r>
-                    </a:p>
-                  </a:txBody>
-                  <a:tcPr>
-                    <a:solidFill>
-                      <a:srgbClr val="0E1A2B"/>
-                    </a:solidFill>
-                  </a:tcPr>
-                </a:tc>
-              </a:tr>
-              <a:tr h="365760">
-                <a:tc>
-                  <a:txBody>
-                    <a:bodyPr/>
-                    <a:lstStyle/>
-                    <a:p>
-                      <a:r>
-                        <a:rPr sz="1250">
-                          <a:solidFill>
-                            <a:srgbClr val="0E1A2B"/>
-                          </a:solidFill>
-                        </a:rPr>
-                        <a:t>Schema build</a:t>
-                      </a:r>
-                    </a:p>
-                  </a:txBody>
-                  <a:tcPr>
-                    <a:solidFill>
-                      <a:srgbClr val="FFFFFF"/>
-                    </a:solidFill>
-                  </a:tcPr>
-                </a:tc>
-                <a:tc>
-                  <a:txBody>
-                    <a:bodyPr/>
-                    <a:lstStyle/>
-                    <a:p>
-                      <a:r>
-                        <a:rPr sz="1250">
-                          <a:solidFill>
-                            <a:srgbClr val="0E1A2B"/>
-                          </a:solidFill>
-                        </a:rPr>
-                        <a:t>12/12 tables created; all constraints attached</a:t>
-                      </a:r>
-                    </a:p>
-                  </a:txBody>
-                  <a:tcPr>
-                    <a:solidFill>
-                      <a:srgbClr val="FFFFFF"/>
-                    </a:solidFill>
-                  </a:tcPr>
-                </a:tc>
-                <a:tc>
-                  <a:txBody>
-                    <a:bodyPr/>
-                    <a:lstStyle/>
-                    <a:p>
-                      <a:r>
-                        <a:rPr sz="1250">
-                          <a:solidFill>
-                            <a:srgbClr val="0E1A2B"/>
-                          </a:solidFill>
-                        </a:rPr>
-                        <a:t>PASS</a:t>
-                      </a:r>
-                    </a:p>
-                  </a:txBody>
-                  <a:tcPr>
-                    <a:solidFill>
-                      <a:srgbClr val="FFFFFF"/>
-                    </a:solidFill>
-                  </a:tcPr>
-                </a:tc>
-              </a:tr>
-              <a:tr h="365760">
-                <a:tc>
-                  <a:txBody>
-                    <a:bodyPr/>
-                    <a:lstStyle/>
-                    <a:p>
-                      <a:r>
-                        <a:rPr sz="1250">
-                          <a:solidFill>
-                            <a:srgbClr val="0E1A2B"/>
-                          </a:solidFill>
-                        </a:rPr>
-                        <a:t>Seed data</a:t>
-                      </a:r>
-                    </a:p>
-                  </a:txBody>
-                  <a:tcPr>
-                    <a:solidFill>
-                      <a:srgbClr val="EAF0F9"/>
-                    </a:solidFill>
-                  </a:tcPr>
-                </a:tc>
-                <a:tc>
-                  <a:txBody>
-                    <a:bodyPr/>
-                    <a:lstStyle/>
-                    <a:p>
-                      <a:r>
-                        <a:rPr sz="1250">
-                          <a:solidFill>
-                            <a:srgbClr val="0E1A2B"/>
-                          </a:solidFill>
-                        </a:rPr>
-                        <a:t>4 vendors, 6 products, 6 purchases, 6 licenses, 8 allocations loaded</a:t>
-                      </a:r>
-                    </a:p>
-                  </a:txBody>
-                  <a:tcPr>
-                    <a:solidFill>
-                      <a:srgbClr val="EAF0F9"/>
-                    </a:solidFill>
-                  </a:tcPr>
-                </a:tc>
-                <a:tc>
-                  <a:txBody>
-                    <a:bodyPr/>
-                    <a:lstStyle/>
-                    <a:p>
-                      <a:r>
-                        <a:rPr sz="1250">
-                          <a:solidFill>
-                            <a:srgbClr val="0E1A2B"/>
-                          </a:solidFill>
-                        </a:rPr>
-                        <a:t>PASS</a:t>
-                      </a:r>
-                    </a:p>
-                  </a:txBody>
-                  <a:tcPr>
-                    <a:solidFill>
-                      <a:srgbClr val="EAF0F9"/>
-                    </a:solidFill>
-                  </a:tcPr>
-                </a:tc>
-              </a:tr>
-              <a:tr h="365760">
-                <a:tc>
-                  <a:txBody>
-                    <a:bodyPr/>
-                    <a:lstStyle/>
-                    <a:p>
-                      <a:r>
-                        <a:rPr sz="1250">
-                          <a:solidFill>
-                            <a:srgbClr val="0E1A2B"/>
-                          </a:solidFill>
-                        </a:rPr>
-                        <a:t>Reporting views</a:t>
-                      </a:r>
-                    </a:p>
-                  </a:txBody>
-                  <a:tcPr>
-                    <a:solidFill>
-                      <a:srgbClr val="FFFFFF"/>
-                    </a:solidFill>
-                  </a:tcPr>
-                </a:tc>
-                <a:tc>
-                  <a:txBody>
-                    <a:bodyPr/>
-                    <a:lstStyle/>
-                    <a:p>
-                      <a:r>
-                        <a:rPr sz="1250">
-                          <a:solidFill>
-                            <a:srgbClr val="0E1A2B"/>
-                          </a:solidFill>
-                        </a:rPr>
-                        <a:t>6/6 views return correct aggregates vs manual checks</a:t>
-                      </a:r>
-                    </a:p>
-                  </a:txBody>
-                  <a:tcPr>
-                    <a:solidFill>
-                      <a:srgbClr val="FFFFFF"/>
-                    </a:solidFill>
-                  </a:tcPr>
-                </a:tc>
-                <a:tc>
-                  <a:txBody>
-                    <a:bodyPr/>
-                    <a:lstStyle/>
-                    <a:p>
-                      <a:r>
-                        <a:rPr sz="1250">
-                          <a:solidFill>
-                            <a:srgbClr val="0E1A2B"/>
-                          </a:solidFill>
-                        </a:rPr>
-                        <a:t>PASS</a:t>
-                      </a:r>
-                    </a:p>
-                  </a:txBody>
-                  <a:tcPr>
-                    <a:solidFill>
-                      <a:srgbClr val="FFFFFF"/>
-                    </a:solidFill>
-                  </a:tcPr>
-                </a:tc>
-              </a:tr>
-              <a:tr h="365760">
-                <a:tc>
-                  <a:txBody>
-                    <a:bodyPr/>
-                    <a:lstStyle/>
-                    <a:p>
-                      <a:r>
-                        <a:rPr sz="1250">
-                          <a:solidFill>
-                            <a:srgbClr val="0E1A2B"/>
-                          </a:solidFill>
-                        </a:rPr>
-                        <a:t>Workflows</a:t>
-                      </a:r>
-                    </a:p>
-                  </a:txBody>
-                  <a:tcPr>
-                    <a:solidFill>
-                      <a:srgbClr val="EAF0F9"/>
-                    </a:solidFill>
-                  </a:tcPr>
-                </a:tc>
-                <a:tc>
-                  <a:txBody>
-                    <a:bodyPr/>
-                    <a:lstStyle/>
-                    <a:p>
-                      <a:r>
-                        <a:rPr sz="1250">
-                          <a:solidFill>
-                            <a:srgbClr val="0E1A2B"/>
-                          </a:solidFill>
-                        </a:rPr>
-                        <a:t>Allocate / reclaim / renew transactions commit or roll back cleanly</a:t>
-                      </a:r>
-                    </a:p>
-                  </a:txBody>
-                  <a:tcPr>
-                    <a:solidFill>
-                      <a:srgbClr val="EAF0F9"/>
-                    </a:solidFill>
-                  </a:tcPr>
-                </a:tc>
-                <a:tc>
-                  <a:txBody>
-                    <a:bodyPr/>
-                    <a:lstStyle/>
-                    <a:p>
-                      <a:r>
-                        <a:rPr sz="1250">
-                          <a:solidFill>
-                            <a:srgbClr val="0E1A2B"/>
-                          </a:solidFill>
-                        </a:rPr>
-                        <a:t>PASS</a:t>
-                      </a:r>
-                    </a:p>
-                  </a:txBody>
-                  <a:tcPr>
-                    <a:solidFill>
-                      <a:srgbClr val="EAF0F9"/>
-                    </a:solidFill>
-                  </a:tcPr>
-                </a:tc>
-              </a:tr>
-              <a:tr h="365760">
-                <a:tc>
-                  <a:txBody>
-                    <a:bodyPr/>
-                    <a:lstStyle/>
-                    <a:p>
-                      <a:r>
-                        <a:rPr sz="1250">
-                          <a:solidFill>
-                            <a:srgbClr val="0E1A2B"/>
-                          </a:solidFill>
-                        </a:rPr>
-                        <a:t>Negative tests</a:t>
-                      </a:r>
-                    </a:p>
-                  </a:txBody>
-                  <a:tcPr>
-                    <a:solidFill>
-                      <a:srgbClr val="FFFFFF"/>
-                    </a:solidFill>
-                  </a:tcPr>
-                </a:tc>
-                <a:tc>
-                  <a:txBody>
-                    <a:bodyPr/>
-                    <a:lstStyle/>
-                    <a:p>
-                      <a:r>
-                        <a:rPr sz="1250">
-                          <a:solidFill>
-                            <a:srgbClr val="0E1A2B"/>
-                          </a:solidFill>
-                        </a:rPr>
-                        <a:t>Seat limit, expiry, date-order, duplicate-key violations all blocked</a:t>
-                      </a:r>
-                    </a:p>
-                  </a:txBody>
-                  <a:tcPr>
-                    <a:solidFill>
-                      <a:srgbClr val="FFFFFF"/>
-                    </a:solidFill>
-                  </a:tcPr>
-                </a:tc>
-                <a:tc>
-                  <a:txBody>
-                    <a:bodyPr/>
-                    <a:lstStyle/>
-                    <a:p>
-                      <a:r>
-                        <a:rPr sz="1250">
-                          <a:solidFill>
-                            <a:srgbClr val="0E1A2B"/>
-                          </a:solidFill>
-                        </a:rPr>
-                        <a:t>PASS</a:t>
-                      </a:r>
-                    </a:p>
-                  </a:txBody>
-                  <a:tcPr>
-                    <a:solidFill>
-                      <a:srgbClr val="FFFFFF"/>
-                    </a:solidFill>
-                  </a:tcPr>
-                </a:tc>
-              </a:tr>
-              <a:tr h="365760">
-                <a:tc>
-                  <a:txBody>
-                    <a:bodyPr/>
-                    <a:lstStyle/>
-                    <a:p>
-                      <a:r>
-                        <a:rPr sz="1250">
-                          <a:solidFill>
-                            <a:srgbClr val="0E1A2B"/>
-                          </a:solidFill>
-                        </a:rPr>
-                        <a:t>Backups</a:t>
-                      </a:r>
-                    </a:p>
-                  </a:txBody>
-                  <a:tcPr>
-                    <a:solidFill>
-                      <a:srgbClr val="EAF0F9"/>
-                    </a:solidFill>
-                  </a:tcPr>
-                </a:tc>
-                <a:tc>
-                  <a:txBody>
-                    <a:bodyPr/>
-                    <a:lstStyle/>
-                    <a:p>
-                      <a:r>
-                        <a:rPr sz="1250">
-                          <a:solidFill>
-                            <a:srgbClr val="0E1A2B"/>
-                          </a:solidFill>
-                        </a:rPr>
-                        <a:t>mysqldump scheduled backup procedure documented in README</a:t>
-                      </a:r>
-                    </a:p>
-                  </a:txBody>
-                  <a:tcPr>
-                    <a:solidFill>
-                      <a:srgbClr val="EAF0F9"/>
-                    </a:solidFill>
-                  </a:tcPr>
-                </a:tc>
-                <a:tc>
-                  <a:txBody>
-                    <a:bodyPr/>
-                    <a:lstStyle/>
-                    <a:p>
-                      <a:r>
-                        <a:rPr sz="1250">
-                          <a:solidFill>
-                            <a:srgbClr val="0E1A2B"/>
-                          </a:solidFill>
-                        </a:rPr>
-                        <a:t>PLANNED</a:t>
-                      </a:r>
-                    </a:p>
-                  </a:txBody>
-                  <a:tcPr>
-                    <a:solidFill>
-                      <a:srgbClr val="EAF0F9"/>
-                    </a:solidFill>
-                  </a:tcPr>
-                </a:tc>
-              </a:tr>
-            </a:tbl>
-          </a:graphicData>
-        </a:graphic>
-      </p:graphicFrame>
-      <p:sp>
-        <p:nvSpPr>
-          <p:cNvPr id="6" name="TextBox 5"/>
-          <p:cNvSpPr txBox="1"/>
-          <p:nvPr/>
-        </p:nvSpPr>
-        <p:spPr>
-          <a:xfrm>
-            <a:off x="548640" y="6355080"/>
-            <a:ext cx="11064240" cy="365760"/>
+        </p:nvSpPr>
+        <p:spPr>
+          <a:xfrm>
+            <a:off x="548640" y="1554480"/>
+            <a:ext cx="3544824" cy="2377440"/>
           </a:xfrm>
           <a:prstGeom prst="rect">
             <a:avLst/>
           </a:prstGeom>
-          <a:noFill/>
-        </p:spPr>
-        <p:txBody>
-          <a:bodyPr wrap="none">
-            <a:spAutoFit/>
-          </a:bodyPr>
-          <a:lstStyle/>
-          <a:p>
-            <a:r>
-              <a:rPr sz="1000">
+          <a:solidFill>
+            <a:srgbClr val="FFFFFF"/>
+          </a:solidFill>
+          <a:ln>
+            <a:solidFill>
+              <a:srgbClr val="DDE4EE"/>
+            </a:solidFill>
+          </a:ln>
+          <a:effectLst/>
+        </p:spPr>
+        <p:style>
+          <a:lnRef idx="1">
+            <a:schemeClr val="accent1"/>
+          </a:lnRef>
+          <a:fillRef idx="3">
+            <a:schemeClr val="accent1"/>
+          </a:fillRef>
+          <a:effectRef idx="2">
+            <a:schemeClr val="accent1"/>
+          </a:effectRef>
+          <a:fontRef idx="minor">
+            <a:schemeClr val="lt1"/>
+          </a:fontRef>
+        </p:style>
+        <p:txBody>
+          <a:bodyPr rtlCol="0" anchor="ctr" wrap="square" lIns="137160" tIns="109728"/>
+          <a:lstStyle/>
+          <a:p>
+            <a:pPr algn="ctr"/>
+            <a:r>
+              <a:rPr sz="1500" b="1">
+                <a:solidFill>
+                  <a:srgbClr val="1F6FEB"/>
+                </a:solidFill>
+              </a:rPr>
+              <a:t>📊 Dashboard</a:t>
+            </a:r>
+          </a:p>
+          <a:p>
+            <a:r>
+              <a:rPr sz="1150">
                 <a:solidFill>
                   <a:srgbClr val="5A6473"/>
                 </a:solidFill>
               </a:rPr>
-              <a:t>Reports return in well under a second on the demo dataset — NFR performance target met</a:t>
+              <a:t>Live KPIs (licenses, seats, utilization %), color-banded expiry monitor, vendor spend chart, upcoming renewals.</a:t>
+            </a:r>
+          </a:p>
+        </p:txBody>
+      </p:sp>
+      <p:sp>
+        <p:nvSpPr>
+          <p:cNvPr id="6" name="Rectangle 5"/>
+          <p:cNvSpPr/>
+          <p:nvPr/>
+        </p:nvSpPr>
+        <p:spPr>
+          <a:xfrm>
+            <a:off x="4322064" y="1554480"/>
+            <a:ext cx="3544824" cy="2377440"/>
+          </a:xfrm>
+          <a:prstGeom prst="rect">
+            <a:avLst/>
+          </a:prstGeom>
+          <a:solidFill>
+            <a:srgbClr val="FFFFFF"/>
+          </a:solidFill>
+          <a:ln>
+            <a:solidFill>
+              <a:srgbClr val="DDE4EE"/>
+            </a:solidFill>
+          </a:ln>
+          <a:effectLst/>
+        </p:spPr>
+        <p:style>
+          <a:lnRef idx="1">
+            <a:schemeClr val="accent1"/>
+          </a:lnRef>
+          <a:fillRef idx="3">
+            <a:schemeClr val="accent1"/>
+          </a:fillRef>
+          <a:effectRef idx="2">
+            <a:schemeClr val="accent1"/>
+          </a:effectRef>
+          <a:fontRef idx="minor">
+            <a:schemeClr val="lt1"/>
+          </a:fontRef>
+        </p:style>
+        <p:txBody>
+          <a:bodyPr rtlCol="0" anchor="ctr" wrap="square" lIns="137160" tIns="109728"/>
+          <a:lstStyle/>
+          <a:p>
+            <a:pPr algn="ctr"/>
+            <a:r>
+              <a:rPr sz="1500" b="1">
+                <a:solidFill>
+                  <a:srgbClr val="35C4D5"/>
+                </a:solidFill>
+              </a:rPr>
+              <a:t>🔁 Workflows</a:t>
+            </a:r>
+          </a:p>
+          <a:p>
+            <a:r>
+              <a:rPr sz="1150">
+                <a:solidFill>
+                  <a:srgbClr val="5A6473"/>
+                </a:solidFill>
+              </a:rPr>
+              <a:t>Allocate seats (only valid, non-full licenses offered), reclaim seats — rejected actions surface trigger errors in the browser.</a:t>
+            </a:r>
+          </a:p>
+        </p:txBody>
+      </p:sp>
+      <p:sp>
+        <p:nvSpPr>
+          <p:cNvPr id="7" name="Rectangle 6"/>
+          <p:cNvSpPr/>
+          <p:nvPr/>
+        </p:nvSpPr>
+        <p:spPr>
+          <a:xfrm>
+            <a:off x="8095488" y="1554480"/>
+            <a:ext cx="3544824" cy="2377440"/>
+          </a:xfrm>
+          <a:prstGeom prst="rect">
+            <a:avLst/>
+          </a:prstGeom>
+          <a:solidFill>
+            <a:srgbClr val="FFFFFF"/>
+          </a:solidFill>
+          <a:ln>
+            <a:solidFill>
+              <a:srgbClr val="DDE4EE"/>
+            </a:solidFill>
+          </a:ln>
+          <a:effectLst/>
+        </p:spPr>
+        <p:style>
+          <a:lnRef idx="1">
+            <a:schemeClr val="accent1"/>
+          </a:lnRef>
+          <a:fillRef idx="3">
+            <a:schemeClr val="accent1"/>
+          </a:fillRef>
+          <a:effectRef idx="2">
+            <a:schemeClr val="accent1"/>
+          </a:effectRef>
+          <a:fontRef idx="minor">
+            <a:schemeClr val="lt1"/>
+          </a:fontRef>
+        </p:style>
+        <p:txBody>
+          <a:bodyPr rtlCol="0" anchor="ctr" wrap="square" lIns="137160" tIns="109728"/>
+          <a:lstStyle/>
+          <a:p>
+            <a:pPr algn="ctr"/>
+            <a:r>
+              <a:rPr sz="1500" b="1">
+                <a:solidFill>
+                  <a:srgbClr val="1EA97A"/>
+                </a:solidFill>
+              </a:rPr>
+              <a:t>✅ Compliance</a:t>
+            </a:r>
+          </a:p>
+          <a:p>
+            <a:r>
+              <a:rPr sz="1150">
+                <a:solidFill>
+                  <a:srgbClr val="5A6473"/>
+                </a:solidFill>
+              </a:rPr>
+              <a:t>One-click sweep writes dated audit rows; violations (expired / unassigned / inactive user) highlighted in red.</a:t>
+            </a:r>
+          </a:p>
+        </p:txBody>
+      </p:sp>
+      <p:sp>
+        <p:nvSpPr>
+          <p:cNvPr id="8" name="Rectangle 7"/>
+          <p:cNvSpPr/>
+          <p:nvPr/>
+        </p:nvSpPr>
+        <p:spPr>
+          <a:xfrm>
+            <a:off x="548640" y="4114800"/>
+            <a:ext cx="3544824" cy="2011680"/>
+          </a:xfrm>
+          <a:prstGeom prst="rect">
+            <a:avLst/>
+          </a:prstGeom>
+          <a:solidFill>
+            <a:srgbClr val="FFFFFF"/>
+          </a:solidFill>
+          <a:ln>
+            <a:solidFill>
+              <a:srgbClr val="DDE4EE"/>
+            </a:solidFill>
+          </a:ln>
+          <a:effectLst/>
+        </p:spPr>
+        <p:style>
+          <a:lnRef idx="1">
+            <a:schemeClr val="accent1"/>
+          </a:lnRef>
+          <a:fillRef idx="3">
+            <a:schemeClr val="accent1"/>
+          </a:fillRef>
+          <a:effectRef idx="2">
+            <a:schemeClr val="accent1"/>
+          </a:effectRef>
+          <a:fontRef idx="minor">
+            <a:schemeClr val="lt1"/>
+          </a:fontRef>
+        </p:style>
+        <p:txBody>
+          <a:bodyPr rtlCol="0" anchor="ctr" wrap="square" lIns="137160" tIns="109728"/>
+          <a:lstStyle/>
+          <a:p>
+            <a:pPr algn="ctr"/>
+            <a:r>
+              <a:rPr sz="1500" b="1">
+                <a:solidFill>
+                  <a:srgbClr val="1F6FEB"/>
+                </a:solidFill>
+              </a:rPr>
+              <a:t>🛒 Purchases &amp; Renewals</a:t>
+            </a:r>
+          </a:p>
+          <a:p>
+            <a:r>
+              <a:rPr sz="1150">
+                <a:solidFill>
+                  <a:srgbClr val="5A6473"/>
+                </a:solidFill>
+              </a:rPr>
+              <a:t>Record purchases with unique invoices; renewal form extends validity and flips status back to ACTIVE in one transaction.</a:t>
+            </a:r>
+          </a:p>
+        </p:txBody>
+      </p:sp>
+      <p:sp>
+        <p:nvSpPr>
+          <p:cNvPr id="9" name="Rectangle 8"/>
+          <p:cNvSpPr/>
+          <p:nvPr/>
+        </p:nvSpPr>
+        <p:spPr>
+          <a:xfrm>
+            <a:off x="4322064" y="4114800"/>
+            <a:ext cx="3544824" cy="2011680"/>
+          </a:xfrm>
+          <a:prstGeom prst="rect">
+            <a:avLst/>
+          </a:prstGeom>
+          <a:solidFill>
+            <a:srgbClr val="FFFFFF"/>
+          </a:solidFill>
+          <a:ln>
+            <a:solidFill>
+              <a:srgbClr val="DDE4EE"/>
+            </a:solidFill>
+          </a:ln>
+          <a:effectLst/>
+        </p:spPr>
+        <p:style>
+          <a:lnRef idx="1">
+            <a:schemeClr val="accent1"/>
+          </a:lnRef>
+          <a:fillRef idx="3">
+            <a:schemeClr val="accent1"/>
+          </a:fillRef>
+          <a:effectRef idx="2">
+            <a:schemeClr val="accent1"/>
+          </a:effectRef>
+          <a:fontRef idx="minor">
+            <a:schemeClr val="lt1"/>
+          </a:fontRef>
+        </p:style>
+        <p:txBody>
+          <a:bodyPr rtlCol="0" anchor="ctr" wrap="square" lIns="137160" tIns="109728"/>
+          <a:lstStyle/>
+          <a:p>
+            <a:pPr algn="ctr"/>
+            <a:r>
+              <a:rPr sz="1500" b="1">
+                <a:solidFill>
+                  <a:srgbClr val="35C4D5"/>
+                </a:solidFill>
+              </a:rPr>
+              <a:t>⚙️ Manage Data</a:t>
+            </a:r>
+          </a:p>
+          <a:p>
+            <a:r>
+              <a:rPr sz="1150">
+                <a:solidFill>
+                  <a:srgbClr val="5A6473"/>
+                </a:solidFill>
+              </a:rPr>
+              <a:t>Full CRUD on ALL 12 tables: add forms with FK dropdowns &amp; date/enum pickers, spreadsheet-style edits, multi-row delete.</a:t>
+            </a:r>
+          </a:p>
+        </p:txBody>
+      </p:sp>
+      <p:sp>
+        <p:nvSpPr>
+          <p:cNvPr id="10" name="Rectangle 9"/>
+          <p:cNvSpPr/>
+          <p:nvPr/>
+        </p:nvSpPr>
+        <p:spPr>
+          <a:xfrm>
+            <a:off x="8095488" y="4114800"/>
+            <a:ext cx="3544824" cy="2011680"/>
+          </a:xfrm>
+          <a:prstGeom prst="rect">
+            <a:avLst/>
+          </a:prstGeom>
+          <a:solidFill>
+            <a:srgbClr val="FFFFFF"/>
+          </a:solidFill>
+          <a:ln>
+            <a:solidFill>
+              <a:srgbClr val="DDE4EE"/>
+            </a:solidFill>
+          </a:ln>
+          <a:effectLst/>
+        </p:spPr>
+        <p:style>
+          <a:lnRef idx="1">
+            <a:schemeClr val="accent1"/>
+          </a:lnRef>
+          <a:fillRef idx="3">
+            <a:schemeClr val="accent1"/>
+          </a:fillRef>
+          <a:effectRef idx="2">
+            <a:schemeClr val="accent1"/>
+          </a:effectRef>
+          <a:fontRef idx="minor">
+            <a:schemeClr val="lt1"/>
+          </a:fontRef>
+        </p:style>
+        <p:txBody>
+          <a:bodyPr rtlCol="0" anchor="ctr" wrap="square" lIns="137160" tIns="109728"/>
+          <a:lstStyle/>
+          <a:p>
+            <a:pPr algn="ctr"/>
+            <a:r>
+              <a:rPr sz="1500" b="1">
+                <a:solidFill>
+                  <a:srgbClr val="1EA97A"/>
+                </a:solidFill>
+              </a:rPr>
+              <a:t>🛡️ Integrity UX</a:t>
+            </a:r>
+          </a:p>
+          <a:p>
+            <a:r>
+              <a:rPr sz="1150">
+                <a:solidFill>
+                  <a:srgbClr val="5A6473"/>
+                </a:solidFill>
+              </a:rPr>
+              <a:t>BR-01…BR-04, UNIQUE and FK rules enforced by the DB; every violation shows as a clear error toast — zero silent failures.</a:t>
             </a:r>
           </a:p>
         </p:txBody>
@@ -7084,7 +9751,7 @@
                   <a:srgbClr val="35C4D5"/>
                 </a:solidFill>
               </a:rPr>
-              <a:t>CONCLUSION</a:t>
+              <a:t>APPLICATION FEATURES</a:t>
             </a:r>
           </a:p>
           <a:p>
@@ -7094,7 +9761,7 @@
                   <a:srgbClr val="FFFFFF"/>
                 </a:solidFill>
               </a:rPr>
-              <a:t>Conclusion &amp; Future Scope</a:t>
+              <a:t>Application Implementation Notes</a:t>
             </a:r>
           </a:p>
         </p:txBody>
@@ -7152,7 +9819,7 @@
         <p:spPr>
           <a:xfrm>
             <a:off x="548640" y="1371600"/>
-            <a:ext cx="11064240" cy="5120640"/>
+            <a:ext cx="11064240" cy="3520439"/>
           </a:xfrm>
           <a:prstGeom prst="rect">
             <a:avLst/>
@@ -7167,61 +9834,91 @@
           <a:p>
             <a:pPr>
               <a:spcAft>
-                <a:spcPts val="800"/>
+                <a:spcPts val="900"/>
               </a:spcAft>
             </a:pPr>
             <a:r>
-              <a:rPr sz="1500">
+              <a:rPr sz="1400">
                 <a:solidFill>
                   <a:srgbClr val="0E1A2B"/>
                 </a:solidFill>
               </a:rPr>
-              <a:t>• Centralized single source of truth for every license, subscription, allocation and renewal across departments</a:t>
+              <a:t>• Dual-engine access: auto-detects MySQL 8 (LM_DB_* env vars), falls back to a bundled SQLite mirror with identical schema, views and triggers</a:t>
             </a:r>
           </a:p>
           <a:p>
             <a:pPr>
               <a:spcAft>
-                <a:spcPts val="800"/>
+                <a:spcPts val="900"/>
               </a:spcAft>
             </a:pPr>
             <a:r>
-              <a:rPr sz="1500">
+              <a:rPr sz="1400">
                 <a:solidFill>
                   <a:srgbClr val="0E1A2B"/>
                 </a:solidFill>
               </a:rPr>
-              <a:t>• Business rules enforced inside the database — unique keys, seat limits, valid periods and ACID workflows</a:t>
+              <a:t>• crud.py change-diffing: spreadsheet edits write only changed cells (verified 1 change → 1 UPDATE; no changes → 0)</a:t>
             </a:r>
           </a:p>
           <a:p>
             <a:pPr>
               <a:spcAft>
-                <a:spcPts val="800"/>
+                <a:spcPts val="900"/>
               </a:spcAft>
             </a:pPr>
             <a:r>
-              <a:rPr sz="1500">
+              <a:rPr sz="1400">
                 <a:solidFill>
                   <a:srgbClr val="0E1A2B"/>
                 </a:solidFill>
               </a:rPr>
-              <a:t>• Proactive monitoring: expiry bands, automated compliance sweeps and dated audit history</a:t>
+              <a:t>• Expiry consistency: dashboard syncs stored status with validity dates on load; view exposes effective vs stored status</a:t>
             </a:r>
           </a:p>
           <a:p>
             <a:pPr>
               <a:spcAft>
-                <a:spcPts val="800"/>
+                <a:spcPts val="900"/>
               </a:spcAft>
             </a:pPr>
             <a:r>
-              <a:rPr sz="1500">
+              <a:rPr sz="1400">
                 <a:solidFill>
                   <a:srgbClr val="0E1A2B"/>
                 </a:solidFill>
               </a:rPr>
-              <a:t>• Decision support: utilization percentages, department usage and lifetime vendor spend for renewal planning</a:t>
+              <a:t>• Constrained forms: allocatable licenses = ACTIVE + unexpired + seats free; FK dropdowns list only real rows</a:t>
+            </a:r>
+          </a:p>
+          <a:p>
+            <a:pPr>
+              <a:spcAft>
+                <a:spcPts val="900"/>
+              </a:spcAft>
+            </a:pPr>
+            <a:r>
+              <a:rPr sz="1400">
+                <a:solidFill>
+                  <a:srgbClr val="0E1A2B"/>
+                </a:solidFill>
+              </a:rPr>
+              <a:t>• Unique widget keys across all 12 admin tabs (59 keys) — no duplicate-ID errors, stable state</a:t>
+            </a:r>
+          </a:p>
+          <a:p>
+            <a:pPr>
+              <a:spcAft>
+                <a:spcPts val="900"/>
+              </a:spcAft>
+            </a:pPr>
+            <a:r>
+              <a:rPr sz="1400">
+                <a:solidFill>
+                  <a:srgbClr val="0E1A2B"/>
+                </a:solidFill>
+              </a:rPr>
+              <a:t>• Verified headlessly: allocate→edit→reclaim round trip; BR-02/BR-03/UNIQUE/FK rejections surfaced; data restored after tests</a:t>
             </a:r>
           </a:p>
         </p:txBody>
@@ -7234,8 +9931,8 @@
         </p:nvSpPr>
         <p:spPr>
           <a:xfrm>
-            <a:off x="548640" y="4206240"/>
-            <a:ext cx="11064240" cy="5120640"/>
+            <a:off x="548640" y="6355080"/>
+            <a:ext cx="11064240" cy="365760"/>
           </a:xfrm>
           <a:prstGeom prst="rect">
             <a:avLst/>
@@ -7243,67 +9940,224 @@
           <a:noFill/>
         </p:spPr>
         <p:txBody>
-          <a:bodyPr wrap="square">
+          <a:bodyPr wrap="none">
             <a:spAutoFit/>
           </a:bodyPr>
           <a:lstStyle/>
           <a:p>
-            <a:pPr>
-              <a:spcAft>
-                <a:spcPts val="600"/>
-              </a:spcAft>
-            </a:pPr>
-            <a:r>
-              <a:rPr sz="1400">
-                <a:solidFill>
-                  <a:srgbClr val="0E1A2B"/>
+            <a:r>
+              <a:rPr sz="1000">
+                <a:solidFill>
+                  <a:srgbClr val="5A6473"/>
                 </a:solidFill>
               </a:rPr>
-              <a:t>• Web dashboard for department managers and end users on top of the database layer</a:t>
-            </a:r>
-          </a:p>
-          <a:p>
-            <a:pPr>
-              <a:spcAft>
-                <a:spcPts val="600"/>
-              </a:spcAft>
-            </a:pPr>
-            <a:r>
-              <a:rPr sz="1400">
-                <a:solidFill>
-                  <a:srgbClr val="0E1A2B"/>
+              <a:t>Running prototype: streamlit run app.py → http://localhost:8602 (demo DB) or MySQL via LM_DB_* env vars</a:t>
+            </a:r>
+          </a:p>
+        </p:txBody>
+      </p:sp>
+    </p:spTree>
+  </p:cSld>
+  <p:clrMapOvr>
+    <a:masterClrMapping/>
+  </p:clrMapOvr>
+</p:sld>
+</file>
+
+<file path=ppt/slides/slide9.xml><?xml version="1.0" encoding="utf-8"?>
+<p:sld xmlns:a="http://schemas.openxmlformats.org/drawingml/2006/main" xmlns:p="http://schemas.openxmlformats.org/presentationml/2006/main" xmlns:r="http://schemas.openxmlformats.org/officeDocument/2006/relationships">
+  <p:cSld>
+    <p:spTree>
+      <p:nvGrpSpPr>
+        <p:cNvPr id="1" name=""/>
+        <p:cNvGrpSpPr/>
+        <p:nvPr/>
+      </p:nvGrpSpPr>
+      <p:grpSpPr/>
+      <p:sp>
+        <p:nvSpPr>
+          <p:cNvPr id="2" name="Rectangle 1"/>
+          <p:cNvSpPr/>
+          <p:nvPr/>
+        </p:nvSpPr>
+        <p:spPr>
+          <a:xfrm>
+            <a:off x="0" y="0"/>
+            <a:ext cx="12191695" cy="6858000"/>
+          </a:xfrm>
+          <a:prstGeom prst="rect">
+            <a:avLst/>
+          </a:prstGeom>
+          <a:solidFill>
+            <a:srgbClr val="F2F5FA"/>
+          </a:solidFill>
+          <a:ln>
+            <a:noFill/>
+          </a:ln>
+          <a:effectLst/>
+        </p:spPr>
+        <p:style>
+          <a:lnRef idx="1">
+            <a:schemeClr val="accent1"/>
+          </a:lnRef>
+          <a:fillRef idx="3">
+            <a:schemeClr val="accent1"/>
+          </a:fillRef>
+          <a:effectRef idx="2">
+            <a:schemeClr val="accent1"/>
+          </a:effectRef>
+          <a:fontRef idx="minor">
+            <a:schemeClr val="lt1"/>
+          </a:fontRef>
+        </p:style>
+        <p:txBody>
+          <a:bodyPr rtlCol="0" anchor="ctr"/>
+          <a:lstStyle/>
+          <a:p>
+            <a:pPr algn="ctr"/>
+          </a:p>
+        </p:txBody>
+      </p:sp>
+      <p:sp>
+        <p:nvSpPr>
+          <p:cNvPr id="3" name="Rectangle 2"/>
+          <p:cNvSpPr/>
+          <p:nvPr/>
+        </p:nvSpPr>
+        <p:spPr>
+          <a:xfrm>
+            <a:off x="0" y="0"/>
+            <a:ext cx="12191695" cy="1051560"/>
+          </a:xfrm>
+          <a:prstGeom prst="rect">
+            <a:avLst/>
+          </a:prstGeom>
+          <a:solidFill>
+            <a:srgbClr val="0E1A2B"/>
+          </a:solidFill>
+          <a:ln>
+            <a:noFill/>
+          </a:ln>
+          <a:effectLst/>
+        </p:spPr>
+        <p:style>
+          <a:lnRef idx="1">
+            <a:schemeClr val="accent1"/>
+          </a:lnRef>
+          <a:fillRef idx="3">
+            <a:schemeClr val="accent1"/>
+          </a:fillRef>
+          <a:effectRef idx="2">
+            <a:schemeClr val="accent1"/>
+          </a:effectRef>
+          <a:fontRef idx="minor">
+            <a:schemeClr val="lt1"/>
+          </a:fontRef>
+        </p:style>
+        <p:txBody>
+          <a:bodyPr rtlCol="0" anchor="ctr" wrap="square" lIns="502920" tIns="109728"/>
+          <a:lstStyle/>
+          <a:p>
+            <a:pPr algn="ctr"/>
+            <a:r>
+              <a:rPr sz="1200" b="1">
+                <a:solidFill>
+                  <a:srgbClr val="35C4D5"/>
                 </a:solidFill>
               </a:rPr>
-              <a:t>• Email/Slack alerts for CRITICAL expiry band; RBAC integration with campus SSO</a:t>
-            </a:r>
-          </a:p>
-          <a:p>
-            <a:pPr>
-              <a:spcAft>
-                <a:spcPts val="600"/>
-              </a:spcAft>
-            </a:pPr>
-            <a:r>
-              <a:rPr sz="1400">
-                <a:solidFill>
-                  <a:srgbClr val="0E1A2B"/>
+              <a:t>APPLICATION FEATURES</a:t>
+            </a:r>
+          </a:p>
+          <a:p>
+            <a:r>
+              <a:rPr sz="2600" b="1">
+                <a:solidFill>
+                  <a:srgbClr val="FFFFFF"/>
                 </a:solidFill>
               </a:rPr>
-              <a:t>• SaaS API ingestion for automatic usage and true-up reconciliation</a:t>
-            </a:r>
-          </a:p>
-        </p:txBody>
-      </p:sp>
-      <p:sp>
-        <p:nvSpPr>
-          <p:cNvPr id="7" name="TextBox 6"/>
+              <a:t>Application Screenshots</a:t>
+            </a:r>
+          </a:p>
+        </p:txBody>
+      </p:sp>
+      <p:sp>
+        <p:nvSpPr>
+          <p:cNvPr id="4" name="Rectangle 3"/>
+          <p:cNvSpPr/>
+          <p:nvPr/>
+        </p:nvSpPr>
+        <p:spPr>
+          <a:xfrm>
+            <a:off x="0" y="1051560"/>
+            <a:ext cx="12191695" cy="50800"/>
+          </a:xfrm>
+          <a:prstGeom prst="rect">
+            <a:avLst/>
+          </a:prstGeom>
+          <a:solidFill>
+            <a:srgbClr val="35C4D5"/>
+          </a:solidFill>
+          <a:ln>
+            <a:noFill/>
+          </a:ln>
+          <a:effectLst/>
+        </p:spPr>
+        <p:style>
+          <a:lnRef idx="1">
+            <a:schemeClr val="accent1"/>
+          </a:lnRef>
+          <a:fillRef idx="3">
+            <a:schemeClr val="accent1"/>
+          </a:fillRef>
+          <a:effectRef idx="2">
+            <a:schemeClr val="accent1"/>
+          </a:effectRef>
+          <a:fontRef idx="minor">
+            <a:schemeClr val="lt1"/>
+          </a:fontRef>
+        </p:style>
+        <p:txBody>
+          <a:bodyPr rtlCol="0" anchor="ctr"/>
+          <a:lstStyle/>
+          <a:p>
+            <a:pPr algn="ctr"/>
+          </a:p>
+        </p:txBody>
+      </p:sp>
+      <p:pic>
+        <p:nvPicPr>
+          <p:cNvPr id="5" name="Picture 4" descr="dashboard.png"/>
+          <p:cNvPicPr>
+            <a:picLocks noChangeAspect="1"/>
+          </p:cNvPicPr>
+          <p:nvPr/>
+        </p:nvPicPr>
+        <p:blipFill>
+          <a:blip r:embed="rId2"/>
+          <a:stretch>
+            <a:fillRect/>
+          </a:stretch>
+        </p:blipFill>
+        <p:spPr>
+          <a:xfrm>
+            <a:off x="548640" y="2011680"/>
+            <a:ext cx="3474720" cy="2171700"/>
+          </a:xfrm>
+          <a:prstGeom prst="rect">
+            <a:avLst/>
+          </a:prstGeom>
+        </p:spPr>
+      </p:pic>
+      <p:sp>
+        <p:nvSpPr>
+          <p:cNvPr id="6" name="TextBox 5"/>
           <p:cNvSpPr txBox="1"/>
           <p:nvPr/>
         </p:nvSpPr>
         <p:spPr>
           <a:xfrm>
-            <a:off x="548640" y="6355080"/>
-            <a:ext cx="11064240" cy="365760"/>
+            <a:off x="548640" y="4201668"/>
+            <a:ext cx="3474720" cy="274320"/>
           </a:xfrm>
           <a:prstGeom prst="rect">
             <a:avLst/>
@@ -7317,12 +10171,159 @@
           <a:lstStyle/>
           <a:p>
             <a:r>
+              <a:rPr sz="1100" b="1">
+                <a:solidFill>
+                  <a:srgbClr val="0E1A2B"/>
+                </a:solidFill>
+              </a:rPr>
+              <a:t>Dashboard — KPIs, expiry monitor, vendor spend</a:t>
+            </a:r>
+          </a:p>
+        </p:txBody>
+      </p:sp>
+      <p:pic>
+        <p:nvPicPr>
+          <p:cNvPr id="7" name="Picture 6" descr="workflows.png"/>
+          <p:cNvPicPr>
+            <a:picLocks noChangeAspect="1"/>
+          </p:cNvPicPr>
+          <p:nvPr/>
+        </p:nvPicPr>
+        <p:blipFill>
+          <a:blip r:embed="rId3"/>
+          <a:stretch>
+            <a:fillRect/>
+          </a:stretch>
+        </p:blipFill>
+        <p:spPr>
+          <a:xfrm>
+            <a:off x="4251959" y="2011680"/>
+            <a:ext cx="3474720" cy="2171700"/>
+          </a:xfrm>
+          <a:prstGeom prst="rect">
+            <a:avLst/>
+          </a:prstGeom>
+        </p:spPr>
+      </p:pic>
+      <p:sp>
+        <p:nvSpPr>
+          <p:cNvPr id="8" name="TextBox 7"/>
+          <p:cNvSpPr txBox="1"/>
+          <p:nvPr/>
+        </p:nvSpPr>
+        <p:spPr>
+          <a:xfrm>
+            <a:off x="4251959" y="4201668"/>
+            <a:ext cx="3474720" cy="274320"/>
+          </a:xfrm>
+          <a:prstGeom prst="rect">
+            <a:avLst/>
+          </a:prstGeom>
+          <a:noFill/>
+        </p:spPr>
+        <p:txBody>
+          <a:bodyPr wrap="none">
+            <a:spAutoFit/>
+          </a:bodyPr>
+          <a:lstStyle/>
+          <a:p>
+            <a:r>
+              <a:rPr sz="1100" b="1">
+                <a:solidFill>
+                  <a:srgbClr val="0E1A2B"/>
+                </a:solidFill>
+              </a:rPr>
+              <a:t>Allocations — allocate &amp; reclaim seats</a:t>
+            </a:r>
+          </a:p>
+        </p:txBody>
+      </p:sp>
+      <p:pic>
+        <p:nvPicPr>
+          <p:cNvPr id="9" name="Picture 8" descr="compliance.png"/>
+          <p:cNvPicPr>
+            <a:picLocks noChangeAspect="1"/>
+          </p:cNvPicPr>
+          <p:nvPr/>
+        </p:nvPicPr>
+        <p:blipFill>
+          <a:blip r:embed="rId4"/>
+          <a:stretch>
+            <a:fillRect/>
+          </a:stretch>
+        </p:blipFill>
+        <p:spPr>
+          <a:xfrm>
+            <a:off x="7955279" y="2011680"/>
+            <a:ext cx="3474720" cy="2171700"/>
+          </a:xfrm>
+          <a:prstGeom prst="rect">
+            <a:avLst/>
+          </a:prstGeom>
+        </p:spPr>
+      </p:pic>
+      <p:sp>
+        <p:nvSpPr>
+          <p:cNvPr id="10" name="TextBox 9"/>
+          <p:cNvSpPr txBox="1"/>
+          <p:nvPr/>
+        </p:nvSpPr>
+        <p:spPr>
+          <a:xfrm>
+            <a:off x="7955279" y="4201668"/>
+            <a:ext cx="3474720" cy="274320"/>
+          </a:xfrm>
+          <a:prstGeom prst="rect">
+            <a:avLst/>
+          </a:prstGeom>
+          <a:noFill/>
+        </p:spPr>
+        <p:txBody>
+          <a:bodyPr wrap="none">
+            <a:spAutoFit/>
+          </a:bodyPr>
+          <a:lstStyle/>
+          <a:p>
+            <a:r>
+              <a:rPr sz="1100" b="1">
+                <a:solidFill>
+                  <a:srgbClr val="0E1A2B"/>
+                </a:solidFill>
+              </a:rPr>
+              <a:t>Compliance — violations &amp; audit trail</a:t>
+            </a:r>
+          </a:p>
+        </p:txBody>
+      </p:sp>
+      <p:sp>
+        <p:nvSpPr>
+          <p:cNvPr id="11" name="TextBox 10"/>
+          <p:cNvSpPr txBox="1"/>
+          <p:nvPr/>
+        </p:nvSpPr>
+        <p:spPr>
+          <a:xfrm>
+            <a:off x="548640" y="6355080"/>
+            <a:ext cx="11064240" cy="365760"/>
+          </a:xfrm>
+          <a:prstGeom prst="rect">
+            <a:avLst/>
+          </a:prstGeom>
+          <a:noFill/>
+        </p:spPr>
+        <p:txBody>
+          <a:bodyPr wrap="none">
+            <a:spAutoFit/>
+          </a:bodyPr>
+          <a:lstStyle/>
+          <a:p>
+            <a:r>
               <a:rPr sz="1000">
                 <a:solidFill>
                   <a:srgbClr val="5A6473"/>
                 </a:solidFill>
               </a:rPr>
-              <a:t>Thank you — Questions? · Jampana Naga Satya Sai Rishvarma · 25WU0102105 · Woxsen University</a:t>
+              <a:t>Live capture from the running prototype — streamlit run app.py</a:t>
             </a:r>
           </a:p>
         </p:txBody>
